--- a/docs/pptx/carbo/ritu-carbo-linsubhr-egfrdisc-throm2.pptx
+++ b/docs/pptx/carbo/ritu-carbo-linsubhr-egfrdisc-throm2.pptx
@@ -2443,7 +2443,7 @@
           </p:nvSpPr>
           <p:spPr>
             <a:xfrm>
-              <a:off x="1810493" y="2073503"/>
+              <a:off x="1813815" y="2073503"/>
               <a:ext cx="0" cy="3649639"/>
             </a:xfrm>
             <a:custGeom>
@@ -2486,7 +2486,7 @@
           </p:nvSpPr>
           <p:spPr>
             <a:xfrm>
-              <a:off x="4291851" y="2073503"/>
+              <a:off x="4291714" y="2073503"/>
               <a:ext cx="0" cy="3649639"/>
             </a:xfrm>
             <a:custGeom>
@@ -2529,7 +2529,7 @@
           </p:nvSpPr>
           <p:spPr>
             <a:xfrm>
-              <a:off x="6773208" y="2073503"/>
+              <a:off x="6769614" y="2073503"/>
               <a:ext cx="0" cy="3649639"/>
             </a:xfrm>
             <a:custGeom>
@@ -2787,7 +2787,7 @@
           </p:nvSpPr>
           <p:spPr>
             <a:xfrm>
-              <a:off x="3051172" y="2073503"/>
+              <a:off x="3052764" y="2073503"/>
               <a:ext cx="0" cy="3649639"/>
             </a:xfrm>
             <a:custGeom>
@@ -2830,7 +2830,7 @@
           </p:nvSpPr>
           <p:spPr>
             <a:xfrm>
-              <a:off x="5532530" y="2073503"/>
+              <a:off x="5530664" y="2073503"/>
               <a:ext cx="0" cy="3649639"/>
             </a:xfrm>
             <a:custGeom>
@@ -2873,7 +2873,7 @@
           </p:nvSpPr>
           <p:spPr>
             <a:xfrm>
-              <a:off x="8013887" y="2073503"/>
+              <a:off x="8008563" y="2073503"/>
               <a:ext cx="0" cy="3649639"/>
             </a:xfrm>
             <a:custGeom>
@@ -2917,506 +2917,503 @@
           <p:spPr>
             <a:xfrm>
               <a:off x="1172049" y="2073503"/>
-              <a:ext cx="7090630" cy="3370950"/>
+              <a:ext cx="7090630" cy="3369575"/>
             </a:xfrm>
             <a:custGeom>
               <a:avLst/>
               <a:pathLst>
-                <a:path w="7090630" h="3370950">
+                <a:path w="7090630" h="3369575">
                   <a:moveTo>
-                    <a:pt x="2576148" y="0"/>
+                    <a:pt x="2598691" y="0"/>
                   </a:moveTo>
                   <a:lnTo>
-                    <a:pt x="2578410" y="6142"/>
-                  </a:lnTo>
-                  <a:lnTo>
-                    <a:pt x="2650033" y="190339"/>
-                  </a:lnTo>
-                  <a:lnTo>
-                    <a:pt x="2721655" y="364780"/>
-                  </a:lnTo>
-                  <a:lnTo>
-                    <a:pt x="2793278" y="529980"/>
-                  </a:lnTo>
-                  <a:lnTo>
-                    <a:pt x="2864901" y="686431"/>
-                  </a:lnTo>
-                  <a:lnTo>
-                    <a:pt x="2936523" y="834595"/>
-                  </a:lnTo>
-                  <a:lnTo>
-                    <a:pt x="3008146" y="974912"/>
-                  </a:lnTo>
-                  <a:lnTo>
-                    <a:pt x="3079768" y="1107796"/>
-                  </a:lnTo>
-                  <a:lnTo>
-                    <a:pt x="3151391" y="1233642"/>
-                  </a:lnTo>
-                  <a:lnTo>
-                    <a:pt x="3223013" y="1352822"/>
-                  </a:lnTo>
-                  <a:lnTo>
-                    <a:pt x="3294636" y="1465690"/>
-                  </a:lnTo>
-                  <a:lnTo>
-                    <a:pt x="3366258" y="1572580"/>
-                  </a:lnTo>
-                  <a:lnTo>
-                    <a:pt x="3437881" y="1673808"/>
-                  </a:lnTo>
-                  <a:lnTo>
-                    <a:pt x="3509503" y="1769674"/>
-                  </a:lnTo>
-                  <a:lnTo>
-                    <a:pt x="3581126" y="1860462"/>
-                  </a:lnTo>
-                  <a:lnTo>
-                    <a:pt x="3652748" y="1946442"/>
-                  </a:lnTo>
-                  <a:lnTo>
-                    <a:pt x="3724371" y="2027868"/>
-                  </a:lnTo>
-                  <a:lnTo>
-                    <a:pt x="3795993" y="2104981"/>
-                  </a:lnTo>
-                  <a:lnTo>
-                    <a:pt x="3867616" y="2178009"/>
-                  </a:lnTo>
-                  <a:lnTo>
-                    <a:pt x="3939238" y="2247170"/>
-                  </a:lnTo>
-                  <a:lnTo>
-                    <a:pt x="4010861" y="2312667"/>
-                  </a:lnTo>
-                  <a:lnTo>
-                    <a:pt x="4082483" y="2374695"/>
-                  </a:lnTo>
-                  <a:lnTo>
-                    <a:pt x="4154106" y="2433438"/>
-                  </a:lnTo>
-                  <a:lnTo>
-                    <a:pt x="4225729" y="2489069"/>
-                  </a:lnTo>
-                  <a:lnTo>
-                    <a:pt x="4297351" y="2541753"/>
-                  </a:lnTo>
-                  <a:lnTo>
-                    <a:pt x="4368974" y="2591648"/>
-                  </a:lnTo>
-                  <a:lnTo>
-                    <a:pt x="4440596" y="2638899"/>
-                  </a:lnTo>
-                  <a:lnTo>
-                    <a:pt x="4512219" y="2637872"/>
-                  </a:lnTo>
-                  <a:lnTo>
-                    <a:pt x="4583841" y="2612477"/>
-                  </a:lnTo>
-                  <a:lnTo>
-                    <a:pt x="4655464" y="2586319"/>
-                  </a:lnTo>
-                  <a:lnTo>
-                    <a:pt x="4727086" y="2559376"/>
-                  </a:lnTo>
-                  <a:lnTo>
-                    <a:pt x="4798709" y="2531625"/>
-                  </a:lnTo>
-                  <a:lnTo>
-                    <a:pt x="4870331" y="2503040"/>
-                  </a:lnTo>
-                  <a:lnTo>
-                    <a:pt x="4941954" y="2473596"/>
-                  </a:lnTo>
-                  <a:lnTo>
-                    <a:pt x="5013576" y="2443269"/>
-                  </a:lnTo>
-                  <a:lnTo>
-                    <a:pt x="5085199" y="2412032"/>
-                  </a:lnTo>
-                  <a:lnTo>
-                    <a:pt x="5156821" y="2379856"/>
-                  </a:lnTo>
-                  <a:lnTo>
-                    <a:pt x="5228444" y="2346715"/>
-                  </a:lnTo>
-                  <a:lnTo>
-                    <a:pt x="5300066" y="2312579"/>
-                  </a:lnTo>
-                  <a:lnTo>
-                    <a:pt x="5371689" y="2277417"/>
-                  </a:lnTo>
-                  <a:lnTo>
-                    <a:pt x="5443311" y="2241200"/>
-                  </a:lnTo>
-                  <a:lnTo>
-                    <a:pt x="5514934" y="2203896"/>
-                  </a:lnTo>
-                  <a:lnTo>
-                    <a:pt x="5586557" y="2165472"/>
-                  </a:lnTo>
-                  <a:lnTo>
-                    <a:pt x="5658179" y="2125894"/>
-                  </a:lnTo>
-                  <a:lnTo>
-                    <a:pt x="5729802" y="2085128"/>
-                  </a:lnTo>
-                  <a:lnTo>
-                    <a:pt x="5801424" y="2043139"/>
-                  </a:lnTo>
-                  <a:lnTo>
-                    <a:pt x="5873047" y="1999888"/>
-                  </a:lnTo>
-                  <a:lnTo>
-                    <a:pt x="5944669" y="1955339"/>
-                  </a:lnTo>
-                  <a:lnTo>
-                    <a:pt x="6016292" y="1909453"/>
-                  </a:lnTo>
-                  <a:lnTo>
-                    <a:pt x="6087914" y="1862189"/>
-                  </a:lnTo>
-                  <a:lnTo>
-                    <a:pt x="6159537" y="1813506"/>
-                  </a:lnTo>
-                  <a:lnTo>
-                    <a:pt x="6231159" y="1763361"/>
-                  </a:lnTo>
-                  <a:lnTo>
-                    <a:pt x="6302782" y="1711711"/>
-                  </a:lnTo>
-                  <a:lnTo>
-                    <a:pt x="6374404" y="1658510"/>
-                  </a:lnTo>
-                  <a:lnTo>
-                    <a:pt x="6446027" y="1603712"/>
-                  </a:lnTo>
-                  <a:lnTo>
-                    <a:pt x="6517649" y="1547269"/>
-                  </a:lnTo>
-                  <a:lnTo>
-                    <a:pt x="6589272" y="1489132"/>
-                  </a:lnTo>
-                  <a:lnTo>
-                    <a:pt x="6660894" y="1429249"/>
-                  </a:lnTo>
-                  <a:lnTo>
-                    <a:pt x="6732517" y="1367568"/>
-                  </a:lnTo>
-                  <a:lnTo>
-                    <a:pt x="6804139" y="1304035"/>
-                  </a:lnTo>
-                  <a:lnTo>
-                    <a:pt x="6875762" y="1238595"/>
-                  </a:lnTo>
-                  <a:lnTo>
-                    <a:pt x="6947385" y="1171190"/>
-                  </a:lnTo>
-                  <a:lnTo>
-                    <a:pt x="7019007" y="1101762"/>
-                  </a:lnTo>
-                  <a:lnTo>
-                    <a:pt x="7090630" y="1030249"/>
-                  </a:lnTo>
-                  <a:lnTo>
-                    <a:pt x="7090630" y="3370950"/>
-                  </a:lnTo>
-                  <a:lnTo>
-                    <a:pt x="7019007" y="3364642"/>
-                  </a:lnTo>
-                  <a:lnTo>
-                    <a:pt x="6947385" y="3357980"/>
-                  </a:lnTo>
-                  <a:lnTo>
-                    <a:pt x="6875762" y="3350946"/>
-                  </a:lnTo>
-                  <a:lnTo>
-                    <a:pt x="6804139" y="3343519"/>
-                  </a:lnTo>
-                  <a:lnTo>
-                    <a:pt x="6732517" y="3335676"/>
-                  </a:lnTo>
-                  <a:lnTo>
-                    <a:pt x="6660894" y="3327395"/>
-                  </a:lnTo>
-                  <a:lnTo>
-                    <a:pt x="6589272" y="3318650"/>
-                  </a:lnTo>
-                  <a:lnTo>
-                    <a:pt x="6517649" y="3309416"/>
-                  </a:lnTo>
-                  <a:lnTo>
-                    <a:pt x="6446027" y="3299666"/>
-                  </a:lnTo>
-                  <a:lnTo>
-                    <a:pt x="6374404" y="3289371"/>
-                  </a:lnTo>
-                  <a:lnTo>
-                    <a:pt x="6302782" y="3278500"/>
-                  </a:lnTo>
-                  <a:lnTo>
-                    <a:pt x="6231159" y="3267020"/>
-                  </a:lnTo>
-                  <a:lnTo>
-                    <a:pt x="6159537" y="3254899"/>
-                  </a:lnTo>
-                  <a:lnTo>
-                    <a:pt x="6087914" y="3242100"/>
-                  </a:lnTo>
-                  <a:lnTo>
-                    <a:pt x="6016292" y="3228585"/>
-                  </a:lnTo>
-                  <a:lnTo>
-                    <a:pt x="5944669" y="3214314"/>
-                  </a:lnTo>
-                  <a:lnTo>
-                    <a:pt x="5873047" y="3199245"/>
-                  </a:lnTo>
-                  <a:lnTo>
-                    <a:pt x="5801424" y="3183333"/>
-                  </a:lnTo>
-                  <a:lnTo>
-                    <a:pt x="5729802" y="3166531"/>
-                  </a:lnTo>
-                  <a:lnTo>
-                    <a:pt x="5658179" y="3148790"/>
-                  </a:lnTo>
-                  <a:lnTo>
-                    <a:pt x="5586557" y="3130056"/>
-                  </a:lnTo>
-                  <a:lnTo>
-                    <a:pt x="5514934" y="3110274"/>
-                  </a:lnTo>
-                  <a:lnTo>
-                    <a:pt x="5443311" y="3089387"/>
-                  </a:lnTo>
-                  <a:lnTo>
-                    <a:pt x="5371689" y="3067330"/>
-                  </a:lnTo>
-                  <a:lnTo>
-                    <a:pt x="5300066" y="3044041"/>
-                  </a:lnTo>
-                  <a:lnTo>
-                    <a:pt x="5228444" y="3019448"/>
-                  </a:lnTo>
-                  <a:lnTo>
-                    <a:pt x="5156821" y="2993481"/>
-                  </a:lnTo>
-                  <a:lnTo>
-                    <a:pt x="5085199" y="2966061"/>
-                  </a:lnTo>
-                  <a:lnTo>
-                    <a:pt x="5013576" y="2937107"/>
-                  </a:lnTo>
-                  <a:lnTo>
-                    <a:pt x="4941954" y="2906534"/>
-                  </a:lnTo>
-                  <a:lnTo>
-                    <a:pt x="4870331" y="2874251"/>
-                  </a:lnTo>
-                  <a:lnTo>
-                    <a:pt x="4798709" y="2840163"/>
-                  </a:lnTo>
-                  <a:lnTo>
-                    <a:pt x="4727086" y="2804168"/>
-                  </a:lnTo>
-                  <a:lnTo>
-                    <a:pt x="4655464" y="2766160"/>
-                  </a:lnTo>
-                  <a:lnTo>
-                    <a:pt x="4583841" y="2726026"/>
-                  </a:lnTo>
-                  <a:lnTo>
-                    <a:pt x="4512219" y="2683648"/>
-                  </a:lnTo>
-                  <a:lnTo>
-                    <a:pt x="4440596" y="2662527"/>
-                  </a:lnTo>
-                  <a:lnTo>
-                    <a:pt x="4368974" y="2686463"/>
-                  </a:lnTo>
-                  <a:lnTo>
-                    <a:pt x="4297351" y="2709702"/>
-                  </a:lnTo>
-                  <a:lnTo>
-                    <a:pt x="4225729" y="2732263"/>
-                  </a:lnTo>
-                  <a:lnTo>
-                    <a:pt x="4154106" y="2754167"/>
-                  </a:lnTo>
-                  <a:lnTo>
-                    <a:pt x="4082483" y="2775432"/>
-                  </a:lnTo>
-                  <a:lnTo>
-                    <a:pt x="4010861" y="2796078"/>
-                  </a:lnTo>
-                  <a:lnTo>
-                    <a:pt x="3939238" y="2816121"/>
-                  </a:lnTo>
-                  <a:lnTo>
-                    <a:pt x="3867616" y="2835581"/>
-                  </a:lnTo>
-                  <a:lnTo>
-                    <a:pt x="3795993" y="2854473"/>
-                  </a:lnTo>
-                  <a:lnTo>
-                    <a:pt x="3724371" y="2872815"/>
-                  </a:lnTo>
-                  <a:lnTo>
-                    <a:pt x="3652748" y="2890622"/>
-                  </a:lnTo>
-                  <a:lnTo>
-                    <a:pt x="3581126" y="2907910"/>
-                  </a:lnTo>
-                  <a:lnTo>
-                    <a:pt x="3509503" y="2924694"/>
-                  </a:lnTo>
-                  <a:lnTo>
-                    <a:pt x="3437881" y="2940989"/>
-                  </a:lnTo>
-                  <a:lnTo>
-                    <a:pt x="3366258" y="2956809"/>
-                  </a:lnTo>
-                  <a:lnTo>
-                    <a:pt x="3294636" y="2972167"/>
-                  </a:lnTo>
-                  <a:lnTo>
-                    <a:pt x="3223013" y="2987079"/>
-                  </a:lnTo>
-                  <a:lnTo>
-                    <a:pt x="3151391" y="3001555"/>
-                  </a:lnTo>
-                  <a:lnTo>
-                    <a:pt x="3079768" y="3015610"/>
-                  </a:lnTo>
-                  <a:lnTo>
-                    <a:pt x="3008146" y="3029255"/>
-                  </a:lnTo>
-                  <a:lnTo>
-                    <a:pt x="2936523" y="3042502"/>
-                  </a:lnTo>
-                  <a:lnTo>
-                    <a:pt x="2864901" y="3055363"/>
-                  </a:lnTo>
-                  <a:lnTo>
-                    <a:pt x="2793278" y="3067849"/>
-                  </a:lnTo>
-                  <a:lnTo>
-                    <a:pt x="2721655" y="3079971"/>
-                  </a:lnTo>
-                  <a:lnTo>
-                    <a:pt x="2650033" y="3091740"/>
-                  </a:lnTo>
-                  <a:lnTo>
-                    <a:pt x="2578410" y="3103166"/>
-                  </a:lnTo>
-                  <a:lnTo>
-                    <a:pt x="2506788" y="3114259"/>
-                  </a:lnTo>
-                  <a:lnTo>
-                    <a:pt x="2435165" y="3125029"/>
-                  </a:lnTo>
-                  <a:lnTo>
-                    <a:pt x="2363543" y="3135484"/>
-                  </a:lnTo>
-                  <a:lnTo>
-                    <a:pt x="2291920" y="3145635"/>
-                  </a:lnTo>
-                  <a:lnTo>
-                    <a:pt x="2220298" y="3155490"/>
-                  </a:lnTo>
-                  <a:lnTo>
-                    <a:pt x="2148675" y="3165058"/>
-                  </a:lnTo>
-                  <a:lnTo>
-                    <a:pt x="2077053" y="3174347"/>
-                  </a:lnTo>
-                  <a:lnTo>
-                    <a:pt x="2005430" y="3183365"/>
-                  </a:lnTo>
-                  <a:lnTo>
-                    <a:pt x="1933808" y="3192120"/>
-                  </a:lnTo>
-                  <a:lnTo>
-                    <a:pt x="1862185" y="3200621"/>
-                  </a:lnTo>
-                  <a:lnTo>
-                    <a:pt x="1790563" y="3208873"/>
-                  </a:lnTo>
-                  <a:lnTo>
-                    <a:pt x="1718940" y="3216885"/>
-                  </a:lnTo>
-                  <a:lnTo>
-                    <a:pt x="1647318" y="3224663"/>
-                  </a:lnTo>
-                  <a:lnTo>
-                    <a:pt x="1575695" y="3232215"/>
-                  </a:lnTo>
-                  <a:lnTo>
-                    <a:pt x="1504073" y="3239546"/>
-                  </a:lnTo>
-                  <a:lnTo>
-                    <a:pt x="1432450" y="3246664"/>
-                  </a:lnTo>
-                  <a:lnTo>
-                    <a:pt x="1360827" y="3253574"/>
-                  </a:lnTo>
-                  <a:lnTo>
-                    <a:pt x="1289205" y="3260283"/>
-                  </a:lnTo>
-                  <a:lnTo>
-                    <a:pt x="1217582" y="3266796"/>
-                  </a:lnTo>
-                  <a:lnTo>
-                    <a:pt x="1145960" y="3273120"/>
-                  </a:lnTo>
-                  <a:lnTo>
-                    <a:pt x="1074337" y="3279259"/>
-                  </a:lnTo>
-                  <a:lnTo>
-                    <a:pt x="1002715" y="3285219"/>
-                  </a:lnTo>
-                  <a:lnTo>
-                    <a:pt x="931092" y="3291006"/>
-                  </a:lnTo>
-                  <a:lnTo>
-                    <a:pt x="859470" y="3296624"/>
-                  </a:lnTo>
-                  <a:lnTo>
-                    <a:pt x="787847" y="3302078"/>
-                  </a:lnTo>
-                  <a:lnTo>
-                    <a:pt x="716225" y="3307373"/>
-                  </a:lnTo>
-                  <a:lnTo>
-                    <a:pt x="644602" y="3312514"/>
-                  </a:lnTo>
-                  <a:lnTo>
-                    <a:pt x="572980" y="3317505"/>
-                  </a:lnTo>
-                  <a:lnTo>
-                    <a:pt x="501357" y="3322350"/>
-                  </a:lnTo>
-                  <a:lnTo>
-                    <a:pt x="429735" y="3327055"/>
-                  </a:lnTo>
-                  <a:lnTo>
-                    <a:pt x="358112" y="3331622"/>
-                  </a:lnTo>
-                  <a:lnTo>
-                    <a:pt x="286490" y="3336056"/>
-                  </a:lnTo>
-                  <a:lnTo>
-                    <a:pt x="214867" y="3340361"/>
-                  </a:lnTo>
-                  <a:lnTo>
-                    <a:pt x="143245" y="3344540"/>
-                  </a:lnTo>
-                  <a:lnTo>
-                    <a:pt x="71622" y="3348597"/>
-                  </a:lnTo>
-                  <a:lnTo>
-                    <a:pt x="0" y="3352537"/>
+                    <a:pt x="2650033" y="134471"/>
+                  </a:lnTo>
+                  <a:lnTo>
+                    <a:pt x="2721655" y="312111"/>
+                  </a:lnTo>
+                  <a:lnTo>
+                    <a:pt x="2793278" y="480330"/>
+                  </a:lnTo>
+                  <a:lnTo>
+                    <a:pt x="2864901" y="639627"/>
+                  </a:lnTo>
+                  <a:lnTo>
+                    <a:pt x="2936523" y="790474"/>
+                  </a:lnTo>
+                  <a:lnTo>
+                    <a:pt x="3008146" y="933321"/>
+                  </a:lnTo>
+                  <a:lnTo>
+                    <a:pt x="3079768" y="1068592"/>
+                  </a:lnTo>
+                  <a:lnTo>
+                    <a:pt x="3151391" y="1196688"/>
+                  </a:lnTo>
+                  <a:lnTo>
+                    <a:pt x="3223013" y="1317990"/>
+                  </a:lnTo>
+                  <a:lnTo>
+                    <a:pt x="3294636" y="1432859"/>
+                  </a:lnTo>
+                  <a:lnTo>
+                    <a:pt x="3366258" y="1541635"/>
+                  </a:lnTo>
+                  <a:lnTo>
+                    <a:pt x="3437881" y="1644641"/>
+                  </a:lnTo>
+                  <a:lnTo>
+                    <a:pt x="3509503" y="1742185"/>
+                  </a:lnTo>
+                  <a:lnTo>
+                    <a:pt x="3581126" y="1834554"/>
+                  </a:lnTo>
+                  <a:lnTo>
+                    <a:pt x="3652748" y="1922025"/>
+                  </a:lnTo>
+                  <a:lnTo>
+                    <a:pt x="3724371" y="2004856"/>
+                  </a:lnTo>
+                  <a:lnTo>
+                    <a:pt x="3795993" y="2083294"/>
+                  </a:lnTo>
+                  <a:lnTo>
+                    <a:pt x="3867616" y="2157572"/>
+                  </a:lnTo>
+                  <a:lnTo>
+                    <a:pt x="3939238" y="2227910"/>
+                  </a:lnTo>
+                  <a:lnTo>
+                    <a:pt x="4010861" y="2294518"/>
+                  </a:lnTo>
+                  <a:lnTo>
+                    <a:pt x="4082483" y="2357593"/>
+                  </a:lnTo>
+                  <a:lnTo>
+                    <a:pt x="4154106" y="2417322"/>
+                  </a:lnTo>
+                  <a:lnTo>
+                    <a:pt x="4225729" y="2473884"/>
+                  </a:lnTo>
+                  <a:lnTo>
+                    <a:pt x="4297351" y="2527445"/>
+                  </a:lnTo>
+                  <a:lnTo>
+                    <a:pt x="4368974" y="2578166"/>
+                  </a:lnTo>
+                  <a:lnTo>
+                    <a:pt x="4440596" y="2626197"/>
+                  </a:lnTo>
+                  <a:lnTo>
+                    <a:pt x="4512219" y="2644671"/>
+                  </a:lnTo>
+                  <a:lnTo>
+                    <a:pt x="4583841" y="2619444"/>
+                  </a:lnTo>
+                  <a:lnTo>
+                    <a:pt x="4655464" y="2593459"/>
+                  </a:lnTo>
+                  <a:lnTo>
+                    <a:pt x="4727086" y="2566693"/>
+                  </a:lnTo>
+                  <a:lnTo>
+                    <a:pt x="4798709" y="2539121"/>
+                  </a:lnTo>
+                  <a:lnTo>
+                    <a:pt x="4870331" y="2510721"/>
+                  </a:lnTo>
+                  <a:lnTo>
+                    <a:pt x="4941954" y="2481468"/>
+                  </a:lnTo>
+                  <a:lnTo>
+                    <a:pt x="5013576" y="2451334"/>
+                  </a:lnTo>
+                  <a:lnTo>
+                    <a:pt x="5085199" y="2420295"/>
+                  </a:lnTo>
+                  <a:lnTo>
+                    <a:pt x="5156821" y="2388322"/>
+                  </a:lnTo>
+                  <a:lnTo>
+                    <a:pt x="5228444" y="2355388"/>
+                  </a:lnTo>
+                  <a:lnTo>
+                    <a:pt x="5300066" y="2321464"/>
+                  </a:lnTo>
+                  <a:lnTo>
+                    <a:pt x="5371689" y="2286521"/>
+                  </a:lnTo>
+                  <a:lnTo>
+                    <a:pt x="5443311" y="2250526"/>
+                  </a:lnTo>
+                  <a:lnTo>
+                    <a:pt x="5514934" y="2213449"/>
+                  </a:lnTo>
+                  <a:lnTo>
+                    <a:pt x="5586557" y="2175258"/>
+                  </a:lnTo>
+                  <a:lnTo>
+                    <a:pt x="5658179" y="2135919"/>
+                  </a:lnTo>
+                  <a:lnTo>
+                    <a:pt x="5729802" y="2095396"/>
+                  </a:lnTo>
+                  <a:lnTo>
+                    <a:pt x="5801424" y="2053656"/>
+                  </a:lnTo>
+                  <a:lnTo>
+                    <a:pt x="5873047" y="2010660"/>
+                  </a:lnTo>
+                  <a:lnTo>
+                    <a:pt x="5944669" y="1966372"/>
+                  </a:lnTo>
+                  <a:lnTo>
+                    <a:pt x="6016292" y="1920752"/>
+                  </a:lnTo>
+                  <a:lnTo>
+                    <a:pt x="6087914" y="1873761"/>
+                  </a:lnTo>
+                  <a:lnTo>
+                    <a:pt x="6159537" y="1825357"/>
+                  </a:lnTo>
+                  <a:lnTo>
+                    <a:pt x="6231159" y="1775498"/>
+                  </a:lnTo>
+                  <a:lnTo>
+                    <a:pt x="6302782" y="1724140"/>
+                  </a:lnTo>
+                  <a:lnTo>
+                    <a:pt x="6374404" y="1671237"/>
+                  </a:lnTo>
+                  <a:lnTo>
+                    <a:pt x="6446027" y="1616744"/>
+                  </a:lnTo>
+                  <a:lnTo>
+                    <a:pt x="6517649" y="1560613"/>
+                  </a:lnTo>
+                  <a:lnTo>
+                    <a:pt x="6589272" y="1502794"/>
+                  </a:lnTo>
+                  <a:lnTo>
+                    <a:pt x="6660894" y="1443237"/>
+                  </a:lnTo>
+                  <a:lnTo>
+                    <a:pt x="6732517" y="1381889"/>
+                  </a:lnTo>
+                  <a:lnTo>
+                    <a:pt x="6804139" y="1318697"/>
+                  </a:lnTo>
+                  <a:lnTo>
+                    <a:pt x="6875762" y="1253605"/>
+                  </a:lnTo>
+                  <a:lnTo>
+                    <a:pt x="6947385" y="1186556"/>
+                  </a:lnTo>
+                  <a:lnTo>
+                    <a:pt x="7019007" y="1117492"/>
+                  </a:lnTo>
+                  <a:lnTo>
+                    <a:pt x="7090630" y="1046351"/>
+                  </a:lnTo>
+                  <a:lnTo>
+                    <a:pt x="7090630" y="3369575"/>
+                  </a:lnTo>
+                  <a:lnTo>
+                    <a:pt x="7019007" y="3363181"/>
+                  </a:lnTo>
+                  <a:lnTo>
+                    <a:pt x="6947385" y="3356428"/>
+                  </a:lnTo>
+                  <a:lnTo>
+                    <a:pt x="6875762" y="3349297"/>
+                  </a:lnTo>
+                  <a:lnTo>
+                    <a:pt x="6804139" y="3341767"/>
+                  </a:lnTo>
+                  <a:lnTo>
+                    <a:pt x="6732517" y="3333815"/>
+                  </a:lnTo>
+                  <a:lnTo>
+                    <a:pt x="6660894" y="3325417"/>
+                  </a:lnTo>
+                  <a:lnTo>
+                    <a:pt x="6589272" y="3316549"/>
+                  </a:lnTo>
+                  <a:lnTo>
+                    <a:pt x="6517649" y="3307185"/>
+                  </a:lnTo>
+                  <a:lnTo>
+                    <a:pt x="6446027" y="3297295"/>
+                  </a:lnTo>
+                  <a:lnTo>
+                    <a:pt x="6374404" y="3286852"/>
+                  </a:lnTo>
+                  <a:lnTo>
+                    <a:pt x="6302782" y="3275825"/>
+                  </a:lnTo>
+                  <a:lnTo>
+                    <a:pt x="6231159" y="3264179"/>
+                  </a:lnTo>
+                  <a:lnTo>
+                    <a:pt x="6159537" y="3251881"/>
+                  </a:lnTo>
+                  <a:lnTo>
+                    <a:pt x="6087914" y="3238895"/>
+                  </a:lnTo>
+                  <a:lnTo>
+                    <a:pt x="6016292" y="3225181"/>
+                  </a:lnTo>
+                  <a:lnTo>
+                    <a:pt x="5944669" y="3210699"/>
+                  </a:lnTo>
+                  <a:lnTo>
+                    <a:pt x="5873047" y="3195406"/>
+                  </a:lnTo>
+                  <a:lnTo>
+                    <a:pt x="5801424" y="3179256"/>
+                  </a:lnTo>
+                  <a:lnTo>
+                    <a:pt x="5729802" y="3162202"/>
+                  </a:lnTo>
+                  <a:lnTo>
+                    <a:pt x="5658179" y="3144192"/>
+                  </a:lnTo>
+                  <a:lnTo>
+                    <a:pt x="5586557" y="3125174"/>
+                  </a:lnTo>
+                  <a:lnTo>
+                    <a:pt x="5514934" y="3105091"/>
+                  </a:lnTo>
+                  <a:lnTo>
+                    <a:pt x="5443311" y="3083883"/>
+                  </a:lnTo>
+                  <a:lnTo>
+                    <a:pt x="5371689" y="3061487"/>
+                  </a:lnTo>
+                  <a:lnTo>
+                    <a:pt x="5300066" y="3037836"/>
+                  </a:lnTo>
+                  <a:lnTo>
+                    <a:pt x="5228444" y="3012861"/>
+                  </a:lnTo>
+                  <a:lnTo>
+                    <a:pt x="5156821" y="2986487"/>
+                  </a:lnTo>
+                  <a:lnTo>
+                    <a:pt x="5085199" y="2958636"/>
+                  </a:lnTo>
+                  <a:lnTo>
+                    <a:pt x="5013576" y="2929225"/>
+                  </a:lnTo>
+                  <a:lnTo>
+                    <a:pt x="4941954" y="2898167"/>
+                  </a:lnTo>
+                  <a:lnTo>
+                    <a:pt x="4870331" y="2865370"/>
+                  </a:lnTo>
+                  <a:lnTo>
+                    <a:pt x="4798709" y="2830735"/>
+                  </a:lnTo>
+                  <a:lnTo>
+                    <a:pt x="4727086" y="2794160"/>
+                  </a:lnTo>
+                  <a:lnTo>
+                    <a:pt x="4655464" y="2755537"/>
+                  </a:lnTo>
+                  <a:lnTo>
+                    <a:pt x="4583841" y="2714751"/>
+                  </a:lnTo>
+                  <a:lnTo>
+                    <a:pt x="4512219" y="2671680"/>
+                  </a:lnTo>
+                  <a:lnTo>
+                    <a:pt x="4440596" y="2669161"/>
+                  </a:lnTo>
+                  <a:lnTo>
+                    <a:pt x="4368974" y="2692937"/>
+                  </a:lnTo>
+                  <a:lnTo>
+                    <a:pt x="4297351" y="2716018"/>
+                  </a:lnTo>
+                  <a:lnTo>
+                    <a:pt x="4225729" y="2738426"/>
+                  </a:lnTo>
+                  <a:lnTo>
+                    <a:pt x="4154106" y="2760180"/>
+                  </a:lnTo>
+                  <a:lnTo>
+                    <a:pt x="4082483" y="2781299"/>
+                  </a:lnTo>
+                  <a:lnTo>
+                    <a:pt x="4010861" y="2801802"/>
+                  </a:lnTo>
+                  <a:lnTo>
+                    <a:pt x="3939238" y="2821706"/>
+                  </a:lnTo>
+                  <a:lnTo>
+                    <a:pt x="3867616" y="2841029"/>
+                  </a:lnTo>
+                  <a:lnTo>
+                    <a:pt x="3795993" y="2859789"/>
+                  </a:lnTo>
+                  <a:lnTo>
+                    <a:pt x="3724371" y="2878000"/>
+                  </a:lnTo>
+                  <a:lnTo>
+                    <a:pt x="3652748" y="2895680"/>
+                  </a:lnTo>
+                  <a:lnTo>
+                    <a:pt x="3581126" y="2912844"/>
+                  </a:lnTo>
+                  <a:lnTo>
+                    <a:pt x="3509503" y="2929508"/>
+                  </a:lnTo>
+                  <a:lnTo>
+                    <a:pt x="3437881" y="2945684"/>
+                  </a:lnTo>
+                  <a:lnTo>
+                    <a:pt x="3366258" y="2961389"/>
+                  </a:lnTo>
+                  <a:lnTo>
+                    <a:pt x="3294636" y="2976635"/>
+                  </a:lnTo>
+                  <a:lnTo>
+                    <a:pt x="3223013" y="2991436"/>
+                  </a:lnTo>
+                  <a:lnTo>
+                    <a:pt x="3151391" y="3005806"/>
+                  </a:lnTo>
+                  <a:lnTo>
+                    <a:pt x="3079768" y="3019756"/>
+                  </a:lnTo>
+                  <a:lnTo>
+                    <a:pt x="3008146" y="3033298"/>
+                  </a:lnTo>
+                  <a:lnTo>
+                    <a:pt x="2936523" y="3046446"/>
+                  </a:lnTo>
+                  <a:lnTo>
+                    <a:pt x="2864901" y="3059209"/>
+                  </a:lnTo>
+                  <a:lnTo>
+                    <a:pt x="2793278" y="3071600"/>
+                  </a:lnTo>
+                  <a:lnTo>
+                    <a:pt x="2721655" y="3083630"/>
+                  </a:lnTo>
+                  <a:lnTo>
+                    <a:pt x="2650033" y="3095308"/>
+                  </a:lnTo>
+                  <a:lnTo>
+                    <a:pt x="2578410" y="3106646"/>
+                  </a:lnTo>
+                  <a:lnTo>
+                    <a:pt x="2506788" y="3117652"/>
+                  </a:lnTo>
+                  <a:lnTo>
+                    <a:pt x="2435165" y="3128338"/>
+                  </a:lnTo>
+                  <a:lnTo>
+                    <a:pt x="2363543" y="3138711"/>
+                  </a:lnTo>
+                  <a:lnTo>
+                    <a:pt x="2291920" y="3148782"/>
+                  </a:lnTo>
+                  <a:lnTo>
+                    <a:pt x="2220298" y="3158558"/>
+                  </a:lnTo>
+                  <a:lnTo>
+                    <a:pt x="2148675" y="3168050"/>
+                  </a:lnTo>
+                  <a:lnTo>
+                    <a:pt x="2077053" y="3177264"/>
+                  </a:lnTo>
+                  <a:lnTo>
+                    <a:pt x="2005430" y="3186210"/>
+                  </a:lnTo>
+                  <a:lnTo>
+                    <a:pt x="1933808" y="3194894"/>
+                  </a:lnTo>
+                  <a:lnTo>
+                    <a:pt x="1862185" y="3203325"/>
+                  </a:lnTo>
+                  <a:lnTo>
+                    <a:pt x="1790563" y="3211510"/>
+                  </a:lnTo>
+                  <a:lnTo>
+                    <a:pt x="1718940" y="3219455"/>
+                  </a:lnTo>
+                  <a:lnTo>
+                    <a:pt x="1647318" y="3227169"/>
+                  </a:lnTo>
+                  <a:lnTo>
+                    <a:pt x="1575695" y="3234658"/>
+                  </a:lnTo>
+                  <a:lnTo>
+                    <a:pt x="1504073" y="3241928"/>
+                  </a:lnTo>
+                  <a:lnTo>
+                    <a:pt x="1432450" y="3248986"/>
+                  </a:lnTo>
+                  <a:lnTo>
+                    <a:pt x="1360827" y="3255838"/>
+                  </a:lnTo>
+                  <a:lnTo>
+                    <a:pt x="1289205" y="3262491"/>
+                  </a:lnTo>
+                  <a:lnTo>
+                    <a:pt x="1217582" y="3268948"/>
+                  </a:lnTo>
+                  <a:lnTo>
+                    <a:pt x="1145960" y="3275218"/>
+                  </a:lnTo>
+                  <a:lnTo>
+                    <a:pt x="1074337" y="3281304"/>
+                  </a:lnTo>
+                  <a:lnTo>
+                    <a:pt x="1002715" y="3287213"/>
+                  </a:lnTo>
+                  <a:lnTo>
+                    <a:pt x="931092" y="3292949"/>
+                  </a:lnTo>
+                  <a:lnTo>
+                    <a:pt x="859470" y="3298518"/>
+                  </a:lnTo>
+                  <a:lnTo>
+                    <a:pt x="787847" y="3303924"/>
+                  </a:lnTo>
+                  <a:lnTo>
+                    <a:pt x="716225" y="3309173"/>
+                  </a:lnTo>
+                  <a:lnTo>
+                    <a:pt x="644602" y="3314268"/>
+                  </a:lnTo>
+                  <a:lnTo>
+                    <a:pt x="572980" y="3319215"/>
+                  </a:lnTo>
+                  <a:lnTo>
+                    <a:pt x="501357" y="3324017"/>
+                  </a:lnTo>
+                  <a:lnTo>
+                    <a:pt x="429735" y="3328679"/>
+                  </a:lnTo>
+                  <a:lnTo>
+                    <a:pt x="358112" y="3333205"/>
+                  </a:lnTo>
+                  <a:lnTo>
+                    <a:pt x="286490" y="3337599"/>
+                  </a:lnTo>
+                  <a:lnTo>
+                    <a:pt x="214867" y="3341865"/>
+                  </a:lnTo>
+                  <a:lnTo>
+                    <a:pt x="143245" y="3346006"/>
+                  </a:lnTo>
+                  <a:lnTo>
+                    <a:pt x="71622" y="3350026"/>
+                  </a:lnTo>
+                  <a:lnTo>
+                    <a:pt x="0" y="3353929"/>
                   </a:lnTo>
                   <a:close/>
                 </a:path>
@@ -3442,207 +3439,204 @@
           </p:nvSpPr>
           <p:spPr>
             <a:xfrm>
-              <a:off x="3748198" y="2073503"/>
-              <a:ext cx="4514481" cy="2638899"/>
+              <a:off x="3770741" y="2073503"/>
+              <a:ext cx="4491938" cy="2644671"/>
             </a:xfrm>
             <a:custGeom>
               <a:avLst/>
               <a:pathLst>
-                <a:path w="4514481" h="2638899">
+                <a:path w="4491938" h="2644671">
                   <a:moveTo>
                     <a:pt x="0" y="0"/>
                   </a:moveTo>
                   <a:lnTo>
-                    <a:pt x="2262" y="6142"/>
-                  </a:lnTo>
-                  <a:lnTo>
-                    <a:pt x="73884" y="190339"/>
-                  </a:lnTo>
-                  <a:lnTo>
-                    <a:pt x="145507" y="364780"/>
-                  </a:lnTo>
-                  <a:lnTo>
-                    <a:pt x="217129" y="529980"/>
-                  </a:lnTo>
-                  <a:lnTo>
-                    <a:pt x="288752" y="686431"/>
-                  </a:lnTo>
-                  <a:lnTo>
-                    <a:pt x="360374" y="834595"/>
-                  </a:lnTo>
-                  <a:lnTo>
-                    <a:pt x="431997" y="974912"/>
-                  </a:lnTo>
-                  <a:lnTo>
-                    <a:pt x="503619" y="1107796"/>
-                  </a:lnTo>
-                  <a:lnTo>
-                    <a:pt x="575242" y="1233642"/>
-                  </a:lnTo>
-                  <a:lnTo>
-                    <a:pt x="646864" y="1352822"/>
-                  </a:lnTo>
-                  <a:lnTo>
-                    <a:pt x="718487" y="1465690"/>
-                  </a:lnTo>
-                  <a:lnTo>
-                    <a:pt x="790109" y="1572580"/>
-                  </a:lnTo>
-                  <a:lnTo>
-                    <a:pt x="861732" y="1673808"/>
-                  </a:lnTo>
-                  <a:lnTo>
-                    <a:pt x="933354" y="1769674"/>
-                  </a:lnTo>
-                  <a:lnTo>
-                    <a:pt x="1004977" y="1860462"/>
-                  </a:lnTo>
-                  <a:lnTo>
-                    <a:pt x="1076599" y="1946442"/>
-                  </a:lnTo>
-                  <a:lnTo>
-                    <a:pt x="1148222" y="2027868"/>
-                  </a:lnTo>
-                  <a:lnTo>
-                    <a:pt x="1219844" y="2104981"/>
-                  </a:lnTo>
-                  <a:lnTo>
-                    <a:pt x="1291467" y="2178009"/>
-                  </a:lnTo>
-                  <a:lnTo>
-                    <a:pt x="1363090" y="2247170"/>
-                  </a:lnTo>
-                  <a:lnTo>
-                    <a:pt x="1434712" y="2312667"/>
-                  </a:lnTo>
-                  <a:lnTo>
-                    <a:pt x="1506335" y="2374695"/>
-                  </a:lnTo>
-                  <a:lnTo>
-                    <a:pt x="1577957" y="2433438"/>
-                  </a:lnTo>
-                  <a:lnTo>
-                    <a:pt x="1649580" y="2489069"/>
-                  </a:lnTo>
-                  <a:lnTo>
-                    <a:pt x="1721202" y="2541753"/>
-                  </a:lnTo>
-                  <a:lnTo>
-                    <a:pt x="1792825" y="2591648"/>
-                  </a:lnTo>
-                  <a:lnTo>
-                    <a:pt x="1864447" y="2638899"/>
-                  </a:lnTo>
-                  <a:lnTo>
-                    <a:pt x="1936070" y="2637872"/>
-                  </a:lnTo>
-                  <a:lnTo>
-                    <a:pt x="2007692" y="2612477"/>
-                  </a:lnTo>
-                  <a:lnTo>
-                    <a:pt x="2079315" y="2586319"/>
-                  </a:lnTo>
-                  <a:lnTo>
-                    <a:pt x="2150937" y="2559376"/>
-                  </a:lnTo>
-                  <a:lnTo>
-                    <a:pt x="2222560" y="2531625"/>
-                  </a:lnTo>
-                  <a:lnTo>
-                    <a:pt x="2294182" y="2503040"/>
-                  </a:lnTo>
-                  <a:lnTo>
-                    <a:pt x="2365805" y="2473596"/>
-                  </a:lnTo>
-                  <a:lnTo>
-                    <a:pt x="2437427" y="2443269"/>
-                  </a:lnTo>
-                  <a:lnTo>
-                    <a:pt x="2509050" y="2412032"/>
-                  </a:lnTo>
-                  <a:lnTo>
-                    <a:pt x="2580672" y="2379856"/>
-                  </a:lnTo>
-                  <a:lnTo>
-                    <a:pt x="2652295" y="2346715"/>
-                  </a:lnTo>
-                  <a:lnTo>
-                    <a:pt x="2723918" y="2312579"/>
-                  </a:lnTo>
-                  <a:lnTo>
-                    <a:pt x="2795540" y="2277417"/>
-                  </a:lnTo>
-                  <a:lnTo>
-                    <a:pt x="2867163" y="2241200"/>
-                  </a:lnTo>
-                  <a:lnTo>
-                    <a:pt x="2938785" y="2203896"/>
-                  </a:lnTo>
-                  <a:lnTo>
-                    <a:pt x="3010408" y="2165472"/>
-                  </a:lnTo>
-                  <a:lnTo>
-                    <a:pt x="3082030" y="2125894"/>
-                  </a:lnTo>
-                  <a:lnTo>
-                    <a:pt x="3153653" y="2085128"/>
-                  </a:lnTo>
-                  <a:lnTo>
-                    <a:pt x="3225275" y="2043139"/>
-                  </a:lnTo>
-                  <a:lnTo>
-                    <a:pt x="3296898" y="1999888"/>
-                  </a:lnTo>
-                  <a:lnTo>
-                    <a:pt x="3368520" y="1955339"/>
-                  </a:lnTo>
-                  <a:lnTo>
-                    <a:pt x="3440143" y="1909453"/>
-                  </a:lnTo>
-                  <a:lnTo>
-                    <a:pt x="3511765" y="1862189"/>
-                  </a:lnTo>
-                  <a:lnTo>
-                    <a:pt x="3583388" y="1813506"/>
-                  </a:lnTo>
-                  <a:lnTo>
-                    <a:pt x="3655010" y="1763361"/>
-                  </a:lnTo>
-                  <a:lnTo>
-                    <a:pt x="3726633" y="1711711"/>
-                  </a:lnTo>
-                  <a:lnTo>
-                    <a:pt x="3798255" y="1658510"/>
-                  </a:lnTo>
-                  <a:lnTo>
-                    <a:pt x="3869878" y="1603712"/>
-                  </a:lnTo>
-                  <a:lnTo>
-                    <a:pt x="3941500" y="1547269"/>
-                  </a:lnTo>
-                  <a:lnTo>
-                    <a:pt x="4013123" y="1489132"/>
-                  </a:lnTo>
-                  <a:lnTo>
-                    <a:pt x="4084746" y="1429249"/>
-                  </a:lnTo>
-                  <a:lnTo>
-                    <a:pt x="4156368" y="1367568"/>
-                  </a:lnTo>
-                  <a:lnTo>
-                    <a:pt x="4227991" y="1304035"/>
-                  </a:lnTo>
-                  <a:lnTo>
-                    <a:pt x="4299613" y="1238595"/>
-                  </a:lnTo>
-                  <a:lnTo>
-                    <a:pt x="4371236" y="1171190"/>
-                  </a:lnTo>
-                  <a:lnTo>
-                    <a:pt x="4442858" y="1101762"/>
-                  </a:lnTo>
-                  <a:lnTo>
-                    <a:pt x="4514481" y="1030249"/>
+                    <a:pt x="51341" y="134471"/>
+                  </a:lnTo>
+                  <a:lnTo>
+                    <a:pt x="122964" y="312111"/>
+                  </a:lnTo>
+                  <a:lnTo>
+                    <a:pt x="194586" y="480330"/>
+                  </a:lnTo>
+                  <a:lnTo>
+                    <a:pt x="266209" y="639627"/>
+                  </a:lnTo>
+                  <a:lnTo>
+                    <a:pt x="337831" y="790474"/>
+                  </a:lnTo>
+                  <a:lnTo>
+                    <a:pt x="409454" y="933321"/>
+                  </a:lnTo>
+                  <a:lnTo>
+                    <a:pt x="481076" y="1068592"/>
+                  </a:lnTo>
+                  <a:lnTo>
+                    <a:pt x="552699" y="1196688"/>
+                  </a:lnTo>
+                  <a:lnTo>
+                    <a:pt x="624321" y="1317990"/>
+                  </a:lnTo>
+                  <a:lnTo>
+                    <a:pt x="695944" y="1432859"/>
+                  </a:lnTo>
+                  <a:lnTo>
+                    <a:pt x="767566" y="1541635"/>
+                  </a:lnTo>
+                  <a:lnTo>
+                    <a:pt x="839189" y="1644641"/>
+                  </a:lnTo>
+                  <a:lnTo>
+                    <a:pt x="910812" y="1742185"/>
+                  </a:lnTo>
+                  <a:lnTo>
+                    <a:pt x="982434" y="1834554"/>
+                  </a:lnTo>
+                  <a:lnTo>
+                    <a:pt x="1054057" y="1922025"/>
+                  </a:lnTo>
+                  <a:lnTo>
+                    <a:pt x="1125679" y="2004856"/>
+                  </a:lnTo>
+                  <a:lnTo>
+                    <a:pt x="1197302" y="2083294"/>
+                  </a:lnTo>
+                  <a:lnTo>
+                    <a:pt x="1268924" y="2157572"/>
+                  </a:lnTo>
+                  <a:lnTo>
+                    <a:pt x="1340547" y="2227910"/>
+                  </a:lnTo>
+                  <a:lnTo>
+                    <a:pt x="1412169" y="2294518"/>
+                  </a:lnTo>
+                  <a:lnTo>
+                    <a:pt x="1483792" y="2357593"/>
+                  </a:lnTo>
+                  <a:lnTo>
+                    <a:pt x="1555414" y="2417322"/>
+                  </a:lnTo>
+                  <a:lnTo>
+                    <a:pt x="1627037" y="2473884"/>
+                  </a:lnTo>
+                  <a:lnTo>
+                    <a:pt x="1698659" y="2527445"/>
+                  </a:lnTo>
+                  <a:lnTo>
+                    <a:pt x="1770282" y="2578166"/>
+                  </a:lnTo>
+                  <a:lnTo>
+                    <a:pt x="1841904" y="2626197"/>
+                  </a:lnTo>
+                  <a:lnTo>
+                    <a:pt x="1913527" y="2644671"/>
+                  </a:lnTo>
+                  <a:lnTo>
+                    <a:pt x="1985149" y="2619444"/>
+                  </a:lnTo>
+                  <a:lnTo>
+                    <a:pt x="2056772" y="2593459"/>
+                  </a:lnTo>
+                  <a:lnTo>
+                    <a:pt x="2128394" y="2566693"/>
+                  </a:lnTo>
+                  <a:lnTo>
+                    <a:pt x="2200017" y="2539121"/>
+                  </a:lnTo>
+                  <a:lnTo>
+                    <a:pt x="2271640" y="2510721"/>
+                  </a:lnTo>
+                  <a:lnTo>
+                    <a:pt x="2343262" y="2481468"/>
+                  </a:lnTo>
+                  <a:lnTo>
+                    <a:pt x="2414885" y="2451334"/>
+                  </a:lnTo>
+                  <a:lnTo>
+                    <a:pt x="2486507" y="2420295"/>
+                  </a:lnTo>
+                  <a:lnTo>
+                    <a:pt x="2558130" y="2388322"/>
+                  </a:lnTo>
+                  <a:lnTo>
+                    <a:pt x="2629752" y="2355388"/>
+                  </a:lnTo>
+                  <a:lnTo>
+                    <a:pt x="2701375" y="2321464"/>
+                  </a:lnTo>
+                  <a:lnTo>
+                    <a:pt x="2772997" y="2286521"/>
+                  </a:lnTo>
+                  <a:lnTo>
+                    <a:pt x="2844620" y="2250526"/>
+                  </a:lnTo>
+                  <a:lnTo>
+                    <a:pt x="2916242" y="2213449"/>
+                  </a:lnTo>
+                  <a:lnTo>
+                    <a:pt x="2987865" y="2175258"/>
+                  </a:lnTo>
+                  <a:lnTo>
+                    <a:pt x="3059487" y="2135919"/>
+                  </a:lnTo>
+                  <a:lnTo>
+                    <a:pt x="3131110" y="2095396"/>
+                  </a:lnTo>
+                  <a:lnTo>
+                    <a:pt x="3202732" y="2053656"/>
+                  </a:lnTo>
+                  <a:lnTo>
+                    <a:pt x="3274355" y="2010660"/>
+                  </a:lnTo>
+                  <a:lnTo>
+                    <a:pt x="3345977" y="1966372"/>
+                  </a:lnTo>
+                  <a:lnTo>
+                    <a:pt x="3417600" y="1920752"/>
+                  </a:lnTo>
+                  <a:lnTo>
+                    <a:pt x="3489222" y="1873761"/>
+                  </a:lnTo>
+                  <a:lnTo>
+                    <a:pt x="3560845" y="1825357"/>
+                  </a:lnTo>
+                  <a:lnTo>
+                    <a:pt x="3632468" y="1775498"/>
+                  </a:lnTo>
+                  <a:lnTo>
+                    <a:pt x="3704090" y="1724140"/>
+                  </a:lnTo>
+                  <a:lnTo>
+                    <a:pt x="3775713" y="1671237"/>
+                  </a:lnTo>
+                  <a:lnTo>
+                    <a:pt x="3847335" y="1616744"/>
+                  </a:lnTo>
+                  <a:lnTo>
+                    <a:pt x="3918958" y="1560613"/>
+                  </a:lnTo>
+                  <a:lnTo>
+                    <a:pt x="3990580" y="1502794"/>
+                  </a:lnTo>
+                  <a:lnTo>
+                    <a:pt x="4062203" y="1443237"/>
+                  </a:lnTo>
+                  <a:lnTo>
+                    <a:pt x="4133825" y="1381889"/>
+                  </a:lnTo>
+                  <a:lnTo>
+                    <a:pt x="4205448" y="1318697"/>
+                  </a:lnTo>
+                  <a:lnTo>
+                    <a:pt x="4277070" y="1253605"/>
+                  </a:lnTo>
+                  <a:lnTo>
+                    <a:pt x="4348693" y="1186556"/>
+                  </a:lnTo>
+                  <a:lnTo>
+                    <a:pt x="4420315" y="1117492"/>
+                  </a:lnTo>
+                  <a:lnTo>
+                    <a:pt x="4491938" y="1046351"/>
                   </a:lnTo>
                 </a:path>
               </a:pathLst>
@@ -3662,312 +3656,312 @@
           </p:nvSpPr>
           <p:spPr>
             <a:xfrm>
-              <a:off x="1172049" y="4736030"/>
-              <a:ext cx="7090630" cy="708423"/>
+              <a:off x="1172049" y="4742664"/>
+              <a:ext cx="7090630" cy="700414"/>
             </a:xfrm>
             <a:custGeom>
               <a:avLst/>
               <a:pathLst>
-                <a:path w="7090630" h="708423">
+                <a:path w="7090630" h="700414">
                   <a:moveTo>
-                    <a:pt x="7090630" y="708423"/>
+                    <a:pt x="7090630" y="700414"/>
                   </a:moveTo>
                   <a:lnTo>
-                    <a:pt x="7019007" y="702114"/>
-                  </a:lnTo>
-                  <a:lnTo>
-                    <a:pt x="6947385" y="695453"/>
-                  </a:lnTo>
-                  <a:lnTo>
-                    <a:pt x="6875762" y="688419"/>
-                  </a:lnTo>
-                  <a:lnTo>
-                    <a:pt x="6804139" y="680991"/>
-                  </a:lnTo>
-                  <a:lnTo>
-                    <a:pt x="6732517" y="673149"/>
-                  </a:lnTo>
-                  <a:lnTo>
-                    <a:pt x="6660894" y="664867"/>
-                  </a:lnTo>
-                  <a:lnTo>
-                    <a:pt x="6589272" y="656123"/>
-                  </a:lnTo>
-                  <a:lnTo>
-                    <a:pt x="6517649" y="646889"/>
-                  </a:lnTo>
-                  <a:lnTo>
-                    <a:pt x="6446027" y="637139"/>
-                  </a:lnTo>
-                  <a:lnTo>
-                    <a:pt x="6374404" y="626843"/>
-                  </a:lnTo>
-                  <a:lnTo>
-                    <a:pt x="6302782" y="615972"/>
-                  </a:lnTo>
-                  <a:lnTo>
-                    <a:pt x="6231159" y="604493"/>
-                  </a:lnTo>
-                  <a:lnTo>
-                    <a:pt x="6159537" y="592372"/>
-                  </a:lnTo>
-                  <a:lnTo>
-                    <a:pt x="6087914" y="579572"/>
-                  </a:lnTo>
-                  <a:lnTo>
-                    <a:pt x="6016292" y="566057"/>
-                  </a:lnTo>
-                  <a:lnTo>
-                    <a:pt x="5944669" y="551787"/>
-                  </a:lnTo>
-                  <a:lnTo>
-                    <a:pt x="5873047" y="536717"/>
-                  </a:lnTo>
-                  <a:lnTo>
-                    <a:pt x="5801424" y="520806"/>
-                  </a:lnTo>
-                  <a:lnTo>
-                    <a:pt x="5729802" y="504004"/>
-                  </a:lnTo>
-                  <a:lnTo>
-                    <a:pt x="5658179" y="486262"/>
-                  </a:lnTo>
-                  <a:lnTo>
-                    <a:pt x="5586557" y="467529"/>
-                  </a:lnTo>
-                  <a:lnTo>
-                    <a:pt x="5514934" y="447747"/>
-                  </a:lnTo>
-                  <a:lnTo>
-                    <a:pt x="5443311" y="426859"/>
-                  </a:lnTo>
-                  <a:lnTo>
-                    <a:pt x="5371689" y="404803"/>
-                  </a:lnTo>
-                  <a:lnTo>
-                    <a:pt x="5300066" y="381513"/>
-                  </a:lnTo>
-                  <a:lnTo>
-                    <a:pt x="5228444" y="356921"/>
-                  </a:lnTo>
-                  <a:lnTo>
-                    <a:pt x="5156821" y="330953"/>
-                  </a:lnTo>
-                  <a:lnTo>
-                    <a:pt x="5085199" y="303533"/>
-                  </a:lnTo>
-                  <a:lnTo>
-                    <a:pt x="5013576" y="274580"/>
-                  </a:lnTo>
-                  <a:lnTo>
-                    <a:pt x="4941954" y="244007"/>
-                  </a:lnTo>
-                  <a:lnTo>
-                    <a:pt x="4870331" y="211724"/>
-                  </a:lnTo>
-                  <a:lnTo>
-                    <a:pt x="4798709" y="177636"/>
-                  </a:lnTo>
-                  <a:lnTo>
-                    <a:pt x="4727086" y="141641"/>
-                  </a:lnTo>
-                  <a:lnTo>
-                    <a:pt x="4655464" y="103632"/>
-                  </a:lnTo>
-                  <a:lnTo>
-                    <a:pt x="4583841" y="63499"/>
-                  </a:lnTo>
-                  <a:lnTo>
-                    <a:pt x="4512219" y="21120"/>
+                    <a:pt x="7019007" y="694019"/>
+                  </a:lnTo>
+                  <a:lnTo>
+                    <a:pt x="6947385" y="687266"/>
+                  </a:lnTo>
+                  <a:lnTo>
+                    <a:pt x="6875762" y="680135"/>
+                  </a:lnTo>
+                  <a:lnTo>
+                    <a:pt x="6804139" y="672605"/>
+                  </a:lnTo>
+                  <a:lnTo>
+                    <a:pt x="6732517" y="664653"/>
+                  </a:lnTo>
+                  <a:lnTo>
+                    <a:pt x="6660894" y="656255"/>
+                  </a:lnTo>
+                  <a:lnTo>
+                    <a:pt x="6589272" y="647387"/>
+                  </a:lnTo>
+                  <a:lnTo>
+                    <a:pt x="6517649" y="638023"/>
+                  </a:lnTo>
+                  <a:lnTo>
+                    <a:pt x="6446027" y="628134"/>
+                  </a:lnTo>
+                  <a:lnTo>
+                    <a:pt x="6374404" y="617691"/>
+                  </a:lnTo>
+                  <a:lnTo>
+                    <a:pt x="6302782" y="606663"/>
+                  </a:lnTo>
+                  <a:lnTo>
+                    <a:pt x="6231159" y="595017"/>
+                  </a:lnTo>
+                  <a:lnTo>
+                    <a:pt x="6159537" y="582720"/>
+                  </a:lnTo>
+                  <a:lnTo>
+                    <a:pt x="6087914" y="569733"/>
+                  </a:lnTo>
+                  <a:lnTo>
+                    <a:pt x="6016292" y="556019"/>
+                  </a:lnTo>
+                  <a:lnTo>
+                    <a:pt x="5944669" y="541537"/>
+                  </a:lnTo>
+                  <a:lnTo>
+                    <a:pt x="5873047" y="526244"/>
+                  </a:lnTo>
+                  <a:lnTo>
+                    <a:pt x="5801424" y="510094"/>
+                  </a:lnTo>
+                  <a:lnTo>
+                    <a:pt x="5729802" y="493040"/>
+                  </a:lnTo>
+                  <a:lnTo>
+                    <a:pt x="5658179" y="475031"/>
+                  </a:lnTo>
+                  <a:lnTo>
+                    <a:pt x="5586557" y="456012"/>
+                  </a:lnTo>
+                  <a:lnTo>
+                    <a:pt x="5514934" y="435929"/>
+                  </a:lnTo>
+                  <a:lnTo>
+                    <a:pt x="5443311" y="414721"/>
+                  </a:lnTo>
+                  <a:lnTo>
+                    <a:pt x="5371689" y="392325"/>
+                  </a:lnTo>
+                  <a:lnTo>
+                    <a:pt x="5300066" y="368675"/>
+                  </a:lnTo>
+                  <a:lnTo>
+                    <a:pt x="5228444" y="343700"/>
+                  </a:lnTo>
+                  <a:lnTo>
+                    <a:pt x="5156821" y="317326"/>
+                  </a:lnTo>
+                  <a:lnTo>
+                    <a:pt x="5085199" y="289475"/>
+                  </a:lnTo>
+                  <a:lnTo>
+                    <a:pt x="5013576" y="260064"/>
+                  </a:lnTo>
+                  <a:lnTo>
+                    <a:pt x="4941954" y="229006"/>
+                  </a:lnTo>
+                  <a:lnTo>
+                    <a:pt x="4870331" y="196208"/>
+                  </a:lnTo>
+                  <a:lnTo>
+                    <a:pt x="4798709" y="161573"/>
+                  </a:lnTo>
+                  <a:lnTo>
+                    <a:pt x="4727086" y="124998"/>
+                  </a:lnTo>
+                  <a:lnTo>
+                    <a:pt x="4655464" y="86375"/>
+                  </a:lnTo>
+                  <a:lnTo>
+                    <a:pt x="4583841" y="45589"/>
+                  </a:lnTo>
+                  <a:lnTo>
+                    <a:pt x="4512219" y="2518"/>
                   </a:lnTo>
                   <a:lnTo>
                     <a:pt x="4440596" y="0"/>
                   </a:lnTo>
                   <a:lnTo>
-                    <a:pt x="4368974" y="23936"/>
-                  </a:lnTo>
-                  <a:lnTo>
-                    <a:pt x="4297351" y="47174"/>
-                  </a:lnTo>
-                  <a:lnTo>
-                    <a:pt x="4225729" y="69736"/>
-                  </a:lnTo>
-                  <a:lnTo>
-                    <a:pt x="4154106" y="91640"/>
-                  </a:lnTo>
-                  <a:lnTo>
-                    <a:pt x="4082483" y="112905"/>
-                  </a:lnTo>
-                  <a:lnTo>
-                    <a:pt x="4010861" y="133550"/>
-                  </a:lnTo>
-                  <a:lnTo>
-                    <a:pt x="3939238" y="153594"/>
-                  </a:lnTo>
-                  <a:lnTo>
-                    <a:pt x="3867616" y="173053"/>
-                  </a:lnTo>
-                  <a:lnTo>
-                    <a:pt x="3795993" y="191946"/>
-                  </a:lnTo>
-                  <a:lnTo>
-                    <a:pt x="3724371" y="210287"/>
-                  </a:lnTo>
-                  <a:lnTo>
-                    <a:pt x="3652748" y="228094"/>
-                  </a:lnTo>
-                  <a:lnTo>
-                    <a:pt x="3581126" y="245382"/>
-                  </a:lnTo>
-                  <a:lnTo>
-                    <a:pt x="3509503" y="262166"/>
-                  </a:lnTo>
-                  <a:lnTo>
-                    <a:pt x="3437881" y="278461"/>
-                  </a:lnTo>
-                  <a:lnTo>
-                    <a:pt x="3366258" y="294281"/>
-                  </a:lnTo>
-                  <a:lnTo>
-                    <a:pt x="3294636" y="309640"/>
-                  </a:lnTo>
-                  <a:lnTo>
-                    <a:pt x="3223013" y="324551"/>
-                  </a:lnTo>
-                  <a:lnTo>
-                    <a:pt x="3151391" y="339028"/>
-                  </a:lnTo>
-                  <a:lnTo>
-                    <a:pt x="3079768" y="353082"/>
-                  </a:lnTo>
-                  <a:lnTo>
-                    <a:pt x="3008146" y="366727"/>
-                  </a:lnTo>
-                  <a:lnTo>
-                    <a:pt x="2936523" y="379974"/>
-                  </a:lnTo>
-                  <a:lnTo>
-                    <a:pt x="2864901" y="392835"/>
-                  </a:lnTo>
-                  <a:lnTo>
-                    <a:pt x="2793278" y="405322"/>
-                  </a:lnTo>
-                  <a:lnTo>
-                    <a:pt x="2721655" y="417444"/>
-                  </a:lnTo>
-                  <a:lnTo>
-                    <a:pt x="2650033" y="429213"/>
-                  </a:lnTo>
-                  <a:lnTo>
-                    <a:pt x="2578410" y="440639"/>
-                  </a:lnTo>
-                  <a:lnTo>
-                    <a:pt x="2506788" y="451732"/>
-                  </a:lnTo>
-                  <a:lnTo>
-                    <a:pt x="2435165" y="462501"/>
-                  </a:lnTo>
-                  <a:lnTo>
-                    <a:pt x="2363543" y="472957"/>
-                  </a:lnTo>
-                  <a:lnTo>
-                    <a:pt x="2291920" y="483108"/>
-                  </a:lnTo>
-                  <a:lnTo>
-                    <a:pt x="2220298" y="492963"/>
-                  </a:lnTo>
-                  <a:lnTo>
-                    <a:pt x="2148675" y="502531"/>
-                  </a:lnTo>
-                  <a:lnTo>
-                    <a:pt x="2077053" y="511820"/>
-                  </a:lnTo>
-                  <a:lnTo>
-                    <a:pt x="2005430" y="520838"/>
-                  </a:lnTo>
-                  <a:lnTo>
-                    <a:pt x="1933808" y="529593"/>
-                  </a:lnTo>
-                  <a:lnTo>
-                    <a:pt x="1862185" y="538093"/>
-                  </a:lnTo>
-                  <a:lnTo>
-                    <a:pt x="1790563" y="546345"/>
-                  </a:lnTo>
-                  <a:lnTo>
-                    <a:pt x="1718940" y="554357"/>
-                  </a:lnTo>
-                  <a:lnTo>
-                    <a:pt x="1647318" y="562136"/>
-                  </a:lnTo>
-                  <a:lnTo>
-                    <a:pt x="1575695" y="569687"/>
-                  </a:lnTo>
-                  <a:lnTo>
-                    <a:pt x="1504073" y="577019"/>
-                  </a:lnTo>
-                  <a:lnTo>
-                    <a:pt x="1432450" y="584136"/>
-                  </a:lnTo>
-                  <a:lnTo>
-                    <a:pt x="1360827" y="591047"/>
-                  </a:lnTo>
-                  <a:lnTo>
-                    <a:pt x="1289205" y="597756"/>
-                  </a:lnTo>
-                  <a:lnTo>
-                    <a:pt x="1217582" y="604269"/>
-                  </a:lnTo>
-                  <a:lnTo>
-                    <a:pt x="1145960" y="610593"/>
-                  </a:lnTo>
-                  <a:lnTo>
-                    <a:pt x="1074337" y="616732"/>
-                  </a:lnTo>
-                  <a:lnTo>
-                    <a:pt x="1002715" y="622692"/>
-                  </a:lnTo>
-                  <a:lnTo>
-                    <a:pt x="931092" y="628478"/>
-                  </a:lnTo>
-                  <a:lnTo>
-                    <a:pt x="859470" y="634096"/>
-                  </a:lnTo>
-                  <a:lnTo>
-                    <a:pt x="787847" y="639550"/>
-                  </a:lnTo>
-                  <a:lnTo>
-                    <a:pt x="716225" y="644846"/>
-                  </a:lnTo>
-                  <a:lnTo>
-                    <a:pt x="644602" y="649986"/>
-                  </a:lnTo>
-                  <a:lnTo>
-                    <a:pt x="572980" y="654977"/>
-                  </a:lnTo>
-                  <a:lnTo>
-                    <a:pt x="501357" y="659823"/>
-                  </a:lnTo>
-                  <a:lnTo>
-                    <a:pt x="429735" y="664527"/>
-                  </a:lnTo>
-                  <a:lnTo>
-                    <a:pt x="358112" y="669094"/>
-                  </a:lnTo>
-                  <a:lnTo>
-                    <a:pt x="286490" y="673528"/>
-                  </a:lnTo>
-                  <a:lnTo>
-                    <a:pt x="214867" y="677833"/>
-                  </a:lnTo>
-                  <a:lnTo>
-                    <a:pt x="143245" y="682012"/>
-                  </a:lnTo>
-                  <a:lnTo>
-                    <a:pt x="71622" y="686070"/>
-                  </a:lnTo>
-                  <a:lnTo>
-                    <a:pt x="0" y="690009"/>
+                    <a:pt x="4368974" y="23775"/>
+                  </a:lnTo>
+                  <a:lnTo>
+                    <a:pt x="4297351" y="46857"/>
+                  </a:lnTo>
+                  <a:lnTo>
+                    <a:pt x="4225729" y="69265"/>
+                  </a:lnTo>
+                  <a:lnTo>
+                    <a:pt x="4154106" y="91019"/>
+                  </a:lnTo>
+                  <a:lnTo>
+                    <a:pt x="4082483" y="112138"/>
+                  </a:lnTo>
+                  <a:lnTo>
+                    <a:pt x="4010861" y="132640"/>
+                  </a:lnTo>
+                  <a:lnTo>
+                    <a:pt x="3939238" y="152544"/>
+                  </a:lnTo>
+                  <a:lnTo>
+                    <a:pt x="3867616" y="171868"/>
+                  </a:lnTo>
+                  <a:lnTo>
+                    <a:pt x="3795993" y="190627"/>
+                  </a:lnTo>
+                  <a:lnTo>
+                    <a:pt x="3724371" y="208839"/>
+                  </a:lnTo>
+                  <a:lnTo>
+                    <a:pt x="3652748" y="226519"/>
+                  </a:lnTo>
+                  <a:lnTo>
+                    <a:pt x="3581126" y="243683"/>
+                  </a:lnTo>
+                  <a:lnTo>
+                    <a:pt x="3509503" y="260346"/>
+                  </a:lnTo>
+                  <a:lnTo>
+                    <a:pt x="3437881" y="276523"/>
+                  </a:lnTo>
+                  <a:lnTo>
+                    <a:pt x="3366258" y="292227"/>
+                  </a:lnTo>
+                  <a:lnTo>
+                    <a:pt x="3294636" y="307474"/>
+                  </a:lnTo>
+                  <a:lnTo>
+                    <a:pt x="3223013" y="322275"/>
+                  </a:lnTo>
+                  <a:lnTo>
+                    <a:pt x="3151391" y="336644"/>
+                  </a:lnTo>
+                  <a:lnTo>
+                    <a:pt x="3079768" y="350594"/>
+                  </a:lnTo>
+                  <a:lnTo>
+                    <a:pt x="3008146" y="364136"/>
+                  </a:lnTo>
+                  <a:lnTo>
+                    <a:pt x="2936523" y="377284"/>
+                  </a:lnTo>
+                  <a:lnTo>
+                    <a:pt x="2864901" y="390048"/>
+                  </a:lnTo>
+                  <a:lnTo>
+                    <a:pt x="2793278" y="402439"/>
+                  </a:lnTo>
+                  <a:lnTo>
+                    <a:pt x="2721655" y="414468"/>
+                  </a:lnTo>
+                  <a:lnTo>
+                    <a:pt x="2650033" y="426146"/>
+                  </a:lnTo>
+                  <a:lnTo>
+                    <a:pt x="2578410" y="437484"/>
+                  </a:lnTo>
+                  <a:lnTo>
+                    <a:pt x="2506788" y="448491"/>
+                  </a:lnTo>
+                  <a:lnTo>
+                    <a:pt x="2435165" y="459176"/>
+                  </a:lnTo>
+                  <a:lnTo>
+                    <a:pt x="2363543" y="469549"/>
+                  </a:lnTo>
+                  <a:lnTo>
+                    <a:pt x="2291920" y="479620"/>
+                  </a:lnTo>
+                  <a:lnTo>
+                    <a:pt x="2220298" y="489397"/>
+                  </a:lnTo>
+                  <a:lnTo>
+                    <a:pt x="2148675" y="498888"/>
+                  </a:lnTo>
+                  <a:lnTo>
+                    <a:pt x="2077053" y="508102"/>
+                  </a:lnTo>
+                  <a:lnTo>
+                    <a:pt x="2005430" y="517048"/>
+                  </a:lnTo>
+                  <a:lnTo>
+                    <a:pt x="1933808" y="525732"/>
+                  </a:lnTo>
+                  <a:lnTo>
+                    <a:pt x="1862185" y="534163"/>
+                  </a:lnTo>
+                  <a:lnTo>
+                    <a:pt x="1790563" y="542348"/>
+                  </a:lnTo>
+                  <a:lnTo>
+                    <a:pt x="1718940" y="550294"/>
+                  </a:lnTo>
+                  <a:lnTo>
+                    <a:pt x="1647318" y="558008"/>
+                  </a:lnTo>
+                  <a:lnTo>
+                    <a:pt x="1575695" y="565496"/>
+                  </a:lnTo>
+                  <a:lnTo>
+                    <a:pt x="1504073" y="572767"/>
+                  </a:lnTo>
+                  <a:lnTo>
+                    <a:pt x="1432450" y="579825"/>
+                  </a:lnTo>
+                  <a:lnTo>
+                    <a:pt x="1360827" y="586677"/>
+                  </a:lnTo>
+                  <a:lnTo>
+                    <a:pt x="1289205" y="593329"/>
+                  </a:lnTo>
+                  <a:lnTo>
+                    <a:pt x="1217582" y="599787"/>
+                  </a:lnTo>
+                  <a:lnTo>
+                    <a:pt x="1145960" y="606056"/>
+                  </a:lnTo>
+                  <a:lnTo>
+                    <a:pt x="1074337" y="612142"/>
+                  </a:lnTo>
+                  <a:lnTo>
+                    <a:pt x="1002715" y="618051"/>
+                  </a:lnTo>
+                  <a:lnTo>
+                    <a:pt x="931092" y="623788"/>
+                  </a:lnTo>
+                  <a:lnTo>
+                    <a:pt x="859470" y="629356"/>
+                  </a:lnTo>
+                  <a:lnTo>
+                    <a:pt x="787847" y="634763"/>
+                  </a:lnTo>
+                  <a:lnTo>
+                    <a:pt x="716225" y="640011"/>
+                  </a:lnTo>
+                  <a:lnTo>
+                    <a:pt x="644602" y="645107"/>
+                  </a:lnTo>
+                  <a:lnTo>
+                    <a:pt x="572980" y="650053"/>
+                  </a:lnTo>
+                  <a:lnTo>
+                    <a:pt x="501357" y="654855"/>
+                  </a:lnTo>
+                  <a:lnTo>
+                    <a:pt x="429735" y="659518"/>
+                  </a:lnTo>
+                  <a:lnTo>
+                    <a:pt x="358112" y="664044"/>
+                  </a:lnTo>
+                  <a:lnTo>
+                    <a:pt x="286490" y="668437"/>
+                  </a:lnTo>
+                  <a:lnTo>
+                    <a:pt x="214867" y="672703"/>
+                  </a:lnTo>
+                  <a:lnTo>
+                    <a:pt x="143245" y="676844"/>
+                  </a:lnTo>
+                  <a:lnTo>
+                    <a:pt x="71622" y="680864"/>
+                  </a:lnTo>
+                  <a:lnTo>
+                    <a:pt x="0" y="684767"/>
                   </a:lnTo>
                 </a:path>
               </a:pathLst>
@@ -3987,312 +3981,312 @@
           </p:nvSpPr>
           <p:spPr>
             <a:xfrm>
-              <a:off x="1172049" y="3758181"/>
-              <a:ext cx="7090630" cy="1273001"/>
+              <a:off x="1172049" y="3750103"/>
+              <a:ext cx="7090630" cy="1279624"/>
             </a:xfrm>
             <a:custGeom>
               <a:avLst/>
               <a:pathLst>
-                <a:path w="7090630" h="1273001">
+                <a:path w="7090630" h="1279624">
                   <a:moveTo>
                     <a:pt x="0" y="0"/>
                   </a:moveTo>
                   <a:lnTo>
-                    <a:pt x="71622" y="22206"/>
-                  </a:lnTo>
-                  <a:lnTo>
-                    <a:pt x="143245" y="44138"/>
-                  </a:lnTo>
-                  <a:lnTo>
-                    <a:pt x="214867" y="65800"/>
-                  </a:lnTo>
-                  <a:lnTo>
-                    <a:pt x="286490" y="87195"/>
-                  </a:lnTo>
-                  <a:lnTo>
-                    <a:pt x="358112" y="108325"/>
-                  </a:lnTo>
-                  <a:lnTo>
-                    <a:pt x="429735" y="129194"/>
-                  </a:lnTo>
-                  <a:lnTo>
-                    <a:pt x="501357" y="149806"/>
-                  </a:lnTo>
-                  <a:lnTo>
-                    <a:pt x="572980" y="170164"/>
-                  </a:lnTo>
-                  <a:lnTo>
-                    <a:pt x="644602" y="190270"/>
-                  </a:lnTo>
-                  <a:lnTo>
-                    <a:pt x="716225" y="210128"/>
-                  </a:lnTo>
-                  <a:lnTo>
-                    <a:pt x="787847" y="229741"/>
-                  </a:lnTo>
-                  <a:lnTo>
-                    <a:pt x="859470" y="249111"/>
-                  </a:lnTo>
-                  <a:lnTo>
-                    <a:pt x="931092" y="268243"/>
-                  </a:lnTo>
-                  <a:lnTo>
-                    <a:pt x="1002715" y="287139"/>
-                  </a:lnTo>
-                  <a:lnTo>
-                    <a:pt x="1074337" y="305801"/>
-                  </a:lnTo>
-                  <a:lnTo>
-                    <a:pt x="1145960" y="324233"/>
-                  </a:lnTo>
-                  <a:lnTo>
-                    <a:pt x="1217582" y="342437"/>
-                  </a:lnTo>
-                  <a:lnTo>
-                    <a:pt x="1289205" y="360417"/>
-                  </a:lnTo>
-                  <a:lnTo>
-                    <a:pt x="1360827" y="378175"/>
-                  </a:lnTo>
-                  <a:lnTo>
-                    <a:pt x="1432450" y="395713"/>
-                  </a:lnTo>
-                  <a:lnTo>
-                    <a:pt x="1504073" y="413035"/>
-                  </a:lnTo>
-                  <a:lnTo>
-                    <a:pt x="1575695" y="430144"/>
-                  </a:lnTo>
-                  <a:lnTo>
-                    <a:pt x="1647318" y="447041"/>
-                  </a:lnTo>
-                  <a:lnTo>
-                    <a:pt x="1718940" y="463729"/>
-                  </a:lnTo>
-                  <a:lnTo>
-                    <a:pt x="1790563" y="480212"/>
-                  </a:lnTo>
-                  <a:lnTo>
-                    <a:pt x="1862185" y="496491"/>
-                  </a:lnTo>
-                  <a:lnTo>
-                    <a:pt x="1933808" y="512569"/>
-                  </a:lnTo>
-                  <a:lnTo>
-                    <a:pt x="2005430" y="528449"/>
-                  </a:lnTo>
-                  <a:lnTo>
-                    <a:pt x="2077053" y="544133"/>
-                  </a:lnTo>
-                  <a:lnTo>
-                    <a:pt x="2148675" y="559623"/>
-                  </a:lnTo>
-                  <a:lnTo>
-                    <a:pt x="2220298" y="574922"/>
-                  </a:lnTo>
-                  <a:lnTo>
-                    <a:pt x="2291920" y="590032"/>
-                  </a:lnTo>
-                  <a:lnTo>
-                    <a:pt x="2363543" y="604955"/>
-                  </a:lnTo>
-                  <a:lnTo>
-                    <a:pt x="2435165" y="619695"/>
-                  </a:lnTo>
-                  <a:lnTo>
-                    <a:pt x="2506788" y="634252"/>
-                  </a:lnTo>
-                  <a:lnTo>
-                    <a:pt x="2578410" y="648630"/>
-                  </a:lnTo>
-                  <a:lnTo>
-                    <a:pt x="2650033" y="662830"/>
-                  </a:lnTo>
-                  <a:lnTo>
-                    <a:pt x="2721655" y="676855"/>
-                  </a:lnTo>
-                  <a:lnTo>
-                    <a:pt x="2793278" y="690707"/>
-                  </a:lnTo>
-                  <a:lnTo>
-                    <a:pt x="2864901" y="704388"/>
-                  </a:lnTo>
-                  <a:lnTo>
-                    <a:pt x="2936523" y="717900"/>
-                  </a:lnTo>
-                  <a:lnTo>
-                    <a:pt x="3008146" y="731245"/>
-                  </a:lnTo>
-                  <a:lnTo>
-                    <a:pt x="3079768" y="744426"/>
-                  </a:lnTo>
-                  <a:lnTo>
-                    <a:pt x="3151391" y="757443"/>
-                  </a:lnTo>
-                  <a:lnTo>
-                    <a:pt x="3223013" y="770301"/>
-                  </a:lnTo>
-                  <a:lnTo>
-                    <a:pt x="3294636" y="782999"/>
-                  </a:lnTo>
-                  <a:lnTo>
-                    <a:pt x="3366258" y="795541"/>
-                  </a:lnTo>
-                  <a:lnTo>
-                    <a:pt x="3437881" y="807928"/>
-                  </a:lnTo>
-                  <a:lnTo>
-                    <a:pt x="3509503" y="820162"/>
-                  </a:lnTo>
-                  <a:lnTo>
-                    <a:pt x="3581126" y="832245"/>
-                  </a:lnTo>
-                  <a:lnTo>
-                    <a:pt x="3652748" y="844178"/>
-                  </a:lnTo>
-                  <a:lnTo>
-                    <a:pt x="3724371" y="855965"/>
-                  </a:lnTo>
-                  <a:lnTo>
-                    <a:pt x="3795993" y="867606"/>
-                  </a:lnTo>
-                  <a:lnTo>
-                    <a:pt x="3867616" y="879103"/>
-                  </a:lnTo>
-                  <a:lnTo>
-                    <a:pt x="3939238" y="890459"/>
-                  </a:lnTo>
-                  <a:lnTo>
-                    <a:pt x="4010861" y="901674"/>
-                  </a:lnTo>
-                  <a:lnTo>
-                    <a:pt x="4082483" y="912751"/>
-                  </a:lnTo>
-                  <a:lnTo>
-                    <a:pt x="4154106" y="923691"/>
-                  </a:lnTo>
-                  <a:lnTo>
-                    <a:pt x="4225729" y="934496"/>
-                  </a:lnTo>
-                  <a:lnTo>
-                    <a:pt x="4297351" y="945168"/>
-                  </a:lnTo>
-                  <a:lnTo>
-                    <a:pt x="4368974" y="955708"/>
-                  </a:lnTo>
-                  <a:lnTo>
-                    <a:pt x="4440596" y="966118"/>
-                  </a:lnTo>
-                  <a:lnTo>
-                    <a:pt x="4512219" y="976399"/>
-                  </a:lnTo>
-                  <a:lnTo>
-                    <a:pt x="4583841" y="986554"/>
-                  </a:lnTo>
-                  <a:lnTo>
-                    <a:pt x="4655464" y="996583"/>
-                  </a:lnTo>
-                  <a:lnTo>
-                    <a:pt x="4727086" y="1006488"/>
-                  </a:lnTo>
-                  <a:lnTo>
-                    <a:pt x="4798709" y="1016271"/>
-                  </a:lnTo>
-                  <a:lnTo>
-                    <a:pt x="4870331" y="1025934"/>
-                  </a:lnTo>
-                  <a:lnTo>
-                    <a:pt x="4941954" y="1035477"/>
-                  </a:lnTo>
-                  <a:lnTo>
-                    <a:pt x="5013576" y="1044902"/>
-                  </a:lnTo>
-                  <a:lnTo>
-                    <a:pt x="5085199" y="1054211"/>
-                  </a:lnTo>
-                  <a:lnTo>
-                    <a:pt x="5156821" y="1063405"/>
-                  </a:lnTo>
-                  <a:lnTo>
-                    <a:pt x="5228444" y="1072486"/>
-                  </a:lnTo>
-                  <a:lnTo>
-                    <a:pt x="5300066" y="1081454"/>
-                  </a:lnTo>
-                  <a:lnTo>
-                    <a:pt x="5371689" y="1090312"/>
-                  </a:lnTo>
-                  <a:lnTo>
-                    <a:pt x="5443311" y="1099060"/>
-                  </a:lnTo>
-                  <a:lnTo>
-                    <a:pt x="5514934" y="1107701"/>
-                  </a:lnTo>
-                  <a:lnTo>
-                    <a:pt x="5586557" y="1116234"/>
-                  </a:lnTo>
-                  <a:lnTo>
-                    <a:pt x="5658179" y="1124663"/>
-                  </a:lnTo>
-                  <a:lnTo>
-                    <a:pt x="5729802" y="1132987"/>
-                  </a:lnTo>
-                  <a:lnTo>
-                    <a:pt x="5801424" y="1141209"/>
-                  </a:lnTo>
-                  <a:lnTo>
-                    <a:pt x="5873047" y="1149329"/>
-                  </a:lnTo>
-                  <a:lnTo>
-                    <a:pt x="5944669" y="1157349"/>
-                  </a:lnTo>
-                  <a:lnTo>
-                    <a:pt x="6016292" y="1165270"/>
-                  </a:lnTo>
-                  <a:lnTo>
-                    <a:pt x="6087914" y="1173093"/>
-                  </a:lnTo>
-                  <a:lnTo>
-                    <a:pt x="6159537" y="1180820"/>
-                  </a:lnTo>
-                  <a:lnTo>
-                    <a:pt x="6231159" y="1188451"/>
-                  </a:lnTo>
-                  <a:lnTo>
-                    <a:pt x="6302782" y="1195988"/>
-                  </a:lnTo>
-                  <a:lnTo>
-                    <a:pt x="6374404" y="1203432"/>
-                  </a:lnTo>
-                  <a:lnTo>
-                    <a:pt x="6446027" y="1210784"/>
-                  </a:lnTo>
-                  <a:lnTo>
-                    <a:pt x="6517649" y="1218046"/>
-                  </a:lnTo>
-                  <a:lnTo>
-                    <a:pt x="6589272" y="1225218"/>
-                  </a:lnTo>
-                  <a:lnTo>
-                    <a:pt x="6660894" y="1232301"/>
-                  </a:lnTo>
-                  <a:lnTo>
-                    <a:pt x="6732517" y="1239297"/>
-                  </a:lnTo>
-                  <a:lnTo>
-                    <a:pt x="6804139" y="1246206"/>
-                  </a:lnTo>
-                  <a:lnTo>
-                    <a:pt x="6875762" y="1253030"/>
-                  </a:lnTo>
-                  <a:lnTo>
-                    <a:pt x="6947385" y="1259770"/>
-                  </a:lnTo>
-                  <a:lnTo>
-                    <a:pt x="7019007" y="1266427"/>
-                  </a:lnTo>
-                  <a:lnTo>
-                    <a:pt x="7090630" y="1273001"/>
+                    <a:pt x="71622" y="22337"/>
+                  </a:lnTo>
+                  <a:lnTo>
+                    <a:pt x="143245" y="44398"/>
+                  </a:lnTo>
+                  <a:lnTo>
+                    <a:pt x="214867" y="66186"/>
+                  </a:lnTo>
+                  <a:lnTo>
+                    <a:pt x="286490" y="87705"/>
+                  </a:lnTo>
+                  <a:lnTo>
+                    <a:pt x="358112" y="108958"/>
+                  </a:lnTo>
+                  <a:lnTo>
+                    <a:pt x="429735" y="129949"/>
+                  </a:lnTo>
+                  <a:lnTo>
+                    <a:pt x="501357" y="150680"/>
+                  </a:lnTo>
+                  <a:lnTo>
+                    <a:pt x="572980" y="171155"/>
+                  </a:lnTo>
+                  <a:lnTo>
+                    <a:pt x="644602" y="191376"/>
+                  </a:lnTo>
+                  <a:lnTo>
+                    <a:pt x="716225" y="211348"/>
+                  </a:lnTo>
+                  <a:lnTo>
+                    <a:pt x="787847" y="231073"/>
+                  </a:lnTo>
+                  <a:lnTo>
+                    <a:pt x="859470" y="250554"/>
+                  </a:lnTo>
+                  <a:lnTo>
+                    <a:pt x="931092" y="269794"/>
+                  </a:lnTo>
+                  <a:lnTo>
+                    <a:pt x="1002715" y="288796"/>
+                  </a:lnTo>
+                  <a:lnTo>
+                    <a:pt x="1074337" y="307564"/>
+                  </a:lnTo>
+                  <a:lnTo>
+                    <a:pt x="1145960" y="326100"/>
+                  </a:lnTo>
+                  <a:lnTo>
+                    <a:pt x="1217582" y="344406"/>
+                  </a:lnTo>
+                  <a:lnTo>
+                    <a:pt x="1289205" y="362486"/>
+                  </a:lnTo>
+                  <a:lnTo>
+                    <a:pt x="1360827" y="380343"/>
+                  </a:lnTo>
+                  <a:lnTo>
+                    <a:pt x="1432450" y="397979"/>
+                  </a:lnTo>
+                  <a:lnTo>
+                    <a:pt x="1504073" y="415397"/>
+                  </a:lnTo>
+                  <a:lnTo>
+                    <a:pt x="1575695" y="432599"/>
+                  </a:lnTo>
+                  <a:lnTo>
+                    <a:pt x="1647318" y="449590"/>
+                  </a:lnTo>
+                  <a:lnTo>
+                    <a:pt x="1718940" y="466370"/>
+                  </a:lnTo>
+                  <a:lnTo>
+                    <a:pt x="1790563" y="482942"/>
+                  </a:lnTo>
+                  <a:lnTo>
+                    <a:pt x="1862185" y="499310"/>
+                  </a:lnTo>
+                  <a:lnTo>
+                    <a:pt x="1933808" y="515476"/>
+                  </a:lnTo>
+                  <a:lnTo>
+                    <a:pt x="2005430" y="531441"/>
+                  </a:lnTo>
+                  <a:lnTo>
+                    <a:pt x="2077053" y="547210"/>
+                  </a:lnTo>
+                  <a:lnTo>
+                    <a:pt x="2148675" y="562783"/>
+                  </a:lnTo>
+                  <a:lnTo>
+                    <a:pt x="2220298" y="578164"/>
+                  </a:lnTo>
+                  <a:lnTo>
+                    <a:pt x="2291920" y="593355"/>
+                  </a:lnTo>
+                  <a:lnTo>
+                    <a:pt x="2363543" y="608358"/>
+                  </a:lnTo>
+                  <a:lnTo>
+                    <a:pt x="2435165" y="623175"/>
+                  </a:lnTo>
+                  <a:lnTo>
+                    <a:pt x="2506788" y="637810"/>
+                  </a:lnTo>
+                  <a:lnTo>
+                    <a:pt x="2578410" y="652263"/>
+                  </a:lnTo>
+                  <a:lnTo>
+                    <a:pt x="2650033" y="666538"/>
+                  </a:lnTo>
+                  <a:lnTo>
+                    <a:pt x="2721655" y="680637"/>
+                  </a:lnTo>
+                  <a:lnTo>
+                    <a:pt x="2793278" y="694561"/>
+                  </a:lnTo>
+                  <a:lnTo>
+                    <a:pt x="2864901" y="708313"/>
+                  </a:lnTo>
+                  <a:lnTo>
+                    <a:pt x="2936523" y="721895"/>
+                  </a:lnTo>
+                  <a:lnTo>
+                    <a:pt x="3008146" y="735309"/>
+                  </a:lnTo>
+                  <a:lnTo>
+                    <a:pt x="3079768" y="748558"/>
+                  </a:lnTo>
+                  <a:lnTo>
+                    <a:pt x="3151391" y="761642"/>
+                  </a:lnTo>
+                  <a:lnTo>
+                    <a:pt x="3223013" y="774565"/>
+                  </a:lnTo>
+                  <a:lnTo>
+                    <a:pt x="3294636" y="787329"/>
+                  </a:lnTo>
+                  <a:lnTo>
+                    <a:pt x="3366258" y="799934"/>
+                  </a:lnTo>
+                  <a:lnTo>
+                    <a:pt x="3437881" y="812384"/>
+                  </a:lnTo>
+                  <a:lnTo>
+                    <a:pt x="3509503" y="824679"/>
+                  </a:lnTo>
+                  <a:lnTo>
+                    <a:pt x="3581126" y="836823"/>
+                  </a:lnTo>
+                  <a:lnTo>
+                    <a:pt x="3652748" y="848817"/>
+                  </a:lnTo>
+                  <a:lnTo>
+                    <a:pt x="3724371" y="860662"/>
+                  </a:lnTo>
+                  <a:lnTo>
+                    <a:pt x="3795993" y="872361"/>
+                  </a:lnTo>
+                  <a:lnTo>
+                    <a:pt x="3867616" y="883916"/>
+                  </a:lnTo>
+                  <a:lnTo>
+                    <a:pt x="3939238" y="895327"/>
+                  </a:lnTo>
+                  <a:lnTo>
+                    <a:pt x="4010861" y="906598"/>
+                  </a:lnTo>
+                  <a:lnTo>
+                    <a:pt x="4082483" y="917729"/>
+                  </a:lnTo>
+                  <a:lnTo>
+                    <a:pt x="4154106" y="928723"/>
+                  </a:lnTo>
+                  <a:lnTo>
+                    <a:pt x="4225729" y="939580"/>
+                  </a:lnTo>
+                  <a:lnTo>
+                    <a:pt x="4297351" y="950304"/>
+                  </a:lnTo>
+                  <a:lnTo>
+                    <a:pt x="4368974" y="960895"/>
+                  </a:lnTo>
+                  <a:lnTo>
+                    <a:pt x="4440596" y="971355"/>
+                  </a:lnTo>
+                  <a:lnTo>
+                    <a:pt x="4512219" y="981686"/>
+                  </a:lnTo>
+                  <a:lnTo>
+                    <a:pt x="4583841" y="991889"/>
+                  </a:lnTo>
+                  <a:lnTo>
+                    <a:pt x="4655464" y="1001966"/>
+                  </a:lnTo>
+                  <a:lnTo>
+                    <a:pt x="4727086" y="1011918"/>
+                  </a:lnTo>
+                  <a:lnTo>
+                    <a:pt x="4798709" y="1021748"/>
+                  </a:lnTo>
+                  <a:lnTo>
+                    <a:pt x="4870331" y="1031455"/>
+                  </a:lnTo>
+                  <a:lnTo>
+                    <a:pt x="4941954" y="1041043"/>
+                  </a:lnTo>
+                  <a:lnTo>
+                    <a:pt x="5013576" y="1050513"/>
+                  </a:lnTo>
+                  <a:lnTo>
+                    <a:pt x="5085199" y="1059865"/>
+                  </a:lnTo>
+                  <a:lnTo>
+                    <a:pt x="5156821" y="1069102"/>
+                  </a:lnTo>
+                  <a:lnTo>
+                    <a:pt x="5228444" y="1078224"/>
+                  </a:lnTo>
+                  <a:lnTo>
+                    <a:pt x="5300066" y="1087234"/>
+                  </a:lnTo>
+                  <a:lnTo>
+                    <a:pt x="5371689" y="1096133"/>
+                  </a:lnTo>
+                  <a:lnTo>
+                    <a:pt x="5443311" y="1104921"/>
+                  </a:lnTo>
+                  <a:lnTo>
+                    <a:pt x="5514934" y="1113601"/>
+                  </a:lnTo>
+                  <a:lnTo>
+                    <a:pt x="5586557" y="1122174"/>
+                  </a:lnTo>
+                  <a:lnTo>
+                    <a:pt x="5658179" y="1130640"/>
+                  </a:lnTo>
+                  <a:lnTo>
+                    <a:pt x="5729802" y="1139002"/>
+                  </a:lnTo>
+                  <a:lnTo>
+                    <a:pt x="5801424" y="1147261"/>
+                  </a:lnTo>
+                  <a:lnTo>
+                    <a:pt x="5873047" y="1155417"/>
+                  </a:lnTo>
+                  <a:lnTo>
+                    <a:pt x="5944669" y="1163473"/>
+                  </a:lnTo>
+                  <a:lnTo>
+                    <a:pt x="6016292" y="1171429"/>
+                  </a:lnTo>
+                  <a:lnTo>
+                    <a:pt x="6087914" y="1179287"/>
+                  </a:lnTo>
+                  <a:lnTo>
+                    <a:pt x="6159537" y="1187047"/>
+                  </a:lnTo>
+                  <a:lnTo>
+                    <a:pt x="6231159" y="1194712"/>
+                  </a:lnTo>
+                  <a:lnTo>
+                    <a:pt x="6302782" y="1202282"/>
+                  </a:lnTo>
+                  <a:lnTo>
+                    <a:pt x="6374404" y="1209759"/>
+                  </a:lnTo>
+                  <a:lnTo>
+                    <a:pt x="6446027" y="1217143"/>
+                  </a:lnTo>
+                  <a:lnTo>
+                    <a:pt x="6517649" y="1224435"/>
+                  </a:lnTo>
+                  <a:lnTo>
+                    <a:pt x="6589272" y="1231638"/>
+                  </a:lnTo>
+                  <a:lnTo>
+                    <a:pt x="6660894" y="1238751"/>
+                  </a:lnTo>
+                  <a:lnTo>
+                    <a:pt x="6732517" y="1245777"/>
+                  </a:lnTo>
+                  <a:lnTo>
+                    <a:pt x="6804139" y="1252716"/>
+                  </a:lnTo>
+                  <a:lnTo>
+                    <a:pt x="6875762" y="1259569"/>
+                  </a:lnTo>
+                  <a:lnTo>
+                    <a:pt x="6947385" y="1266337"/>
+                  </a:lnTo>
+                  <a:lnTo>
+                    <a:pt x="7019007" y="1273022"/>
+                  </a:lnTo>
+                  <a:lnTo>
+                    <a:pt x="7090630" y="1279624"/>
                   </a:lnTo>
                 </a:path>
               </a:pathLst>
@@ -4364,7 +4358,7 @@
           </p:nvSpPr>
           <p:spPr>
             <a:xfrm>
-              <a:off x="5636831" y="2073503"/>
+              <a:off x="5656410" y="2073503"/>
               <a:ext cx="0" cy="3649639"/>
             </a:xfrm>
             <a:custGeom>
@@ -4407,7 +4401,7 @@
           </p:nvSpPr>
           <p:spPr>
             <a:xfrm>
-              <a:off x="4328179" y="2073503"/>
+              <a:off x="4335733" y="2073503"/>
               <a:ext cx="0" cy="3649639"/>
             </a:xfrm>
             <a:custGeom>
@@ -4450,7 +4444,7 @@
           </p:nvSpPr>
           <p:spPr>
             <a:xfrm>
-              <a:off x="6683624" y="2073503"/>
+              <a:off x="6684598" y="2073503"/>
               <a:ext cx="0" cy="3649639"/>
             </a:xfrm>
             <a:custGeom>
@@ -4723,7 +4717,7 @@
           </p:nvSpPr>
           <p:spPr>
             <a:xfrm>
-              <a:off x="2970385" y="5785772"/>
+              <a:off x="2971977" y="5785772"/>
               <a:ext cx="161574" cy="80101"/>
             </a:xfrm>
             <a:prstGeom prst="rect">
@@ -4769,7 +4763,7 @@
           </p:nvSpPr>
           <p:spPr>
             <a:xfrm>
-              <a:off x="5501440" y="5785772"/>
+              <a:off x="5499574" y="5785772"/>
               <a:ext cx="62179" cy="80101"/>
             </a:xfrm>
             <a:prstGeom prst="rect">
@@ -4815,7 +4809,7 @@
           </p:nvSpPr>
           <p:spPr>
             <a:xfrm>
-              <a:off x="7951708" y="5785772"/>
+              <a:off x="7946384" y="5785772"/>
               <a:ext cx="124358" cy="80101"/>
             </a:xfrm>
             <a:prstGeom prst="rect">
@@ -4986,7 +4980,7 @@
                   <a:latin typeface="Helvetica"/>
                   <a:cs typeface="Helvetica"/>
                 </a:rPr>
-                <a:t>subHR per 10 mL/min decline: 1.19 (0.66-2.13), p_Bonf = 1.000 (n = 6)  |  per IQR decline (Δ = 23.7): 1.50 (0.38-5.99)  |  IQR: [-12.1, 11.6]</a:t>
+                <a:t>subHR per 10 mL/min decline: 1.19 (0.66-2.13), p_Bonf = 1.000 (n = 6)  |  per IQR decline (Δ = 23.7): 1.50 (0.38-5.97)  |  IQR: [-12.1, 11.6]</a:t>
               </a:r>
             </a:p>
           </p:txBody>
